--- a/plugins/republican-themes/skills/republican-manuscript/assets/demos/demo-slides.pptx
+++ b/plugins/republican-themes/skills/republican-manuscript/assets/demos/demo-slides.pptx
@@ -3328,10 +3328,10 @@
                   <a:srgbClr val="8B8782"/>
                 </a:solidFill>
                 <a:latin typeface="JetBrains Mono"/>
-                <a:ea typeface="京華老宋体"/>
+                <a:ea typeface="JetBrains Mono"/>
                 <a:cs typeface="JetBrains Mono"/>
               </a:rPr>
-              <a:t>REPUBLICAN MANUSCRIPT EDITION</a:t>
+              <a:t>TESLA 2027 MOCK BRIEFING</a:t>
             </a:r>
           </a:p>
         </p:txBody>
@@ -3369,7 +3369,7 @@
                   <a:srgbClr val="8B8782"/>
                 </a:solidFill>
                 <a:latin typeface="JetBrains Mono"/>
-                <a:ea typeface="京華老宋体"/>
+                <a:ea typeface="JetBrains Mono"/>
                 <a:cs typeface="JetBrains Mono"/>
               </a:rPr>
               <a:t>01 / 08</a:t>
@@ -3385,7 +3385,7 @@
         </p:nvSpPr>
         <p:spPr>
           <a:xfrm>
-            <a:off x="1042416" y="1097280"/>
+            <a:off x="1042416" y="2011680"/>
             <a:ext cx="6400800" cy="2560320"/>
           </a:xfrm>
           <a:prstGeom prst="rect">
@@ -3429,7 +3429,7 @@
         </p:nvSpPr>
         <p:spPr>
           <a:xfrm>
-            <a:off x="1161288" y="1216152"/>
+            <a:off x="1161288" y="2130552"/>
             <a:ext cx="6163056" cy="2322576"/>
           </a:xfrm>
           <a:prstGeom prst="rect">
@@ -3475,7 +3475,7 @@
         </p:nvSpPr>
         <p:spPr>
           <a:xfrm>
-            <a:off x="1389888" y="1389888"/>
+            <a:off x="1389888" y="2304288"/>
             <a:ext cx="5705856" cy="256032"/>
           </a:xfrm>
           <a:prstGeom prst="rect">
@@ -3500,10 +3500,10 @@
                   <a:srgbClr val="D5DEE7"/>
                 </a:solidFill>
                 <a:latin typeface="JetBrains Mono"/>
-                <a:ea typeface="京華老宋体"/>
+                <a:ea typeface="JetBrains Mono"/>
                 <a:cs typeface="JetBrains Mono"/>
               </a:rPr>
-              <a:t>KAMI · SLIDES DEMO</a:t>
+              <a:t>KAMI · REPUBLICAN MANUSCRIPT DEMO</a:t>
             </a:r>
           </a:p>
         </p:txBody>
@@ -3516,7 +3516,7 @@
         </p:nvSpPr>
         <p:spPr>
           <a:xfrm>
-            <a:off x="1371600" y="1792224"/>
+            <a:off x="1371600" y="2706624"/>
             <a:ext cx="5742432" cy="1508760"/>
           </a:xfrm>
           <a:prstGeom prst="rect">
@@ -3540,12 +3540,12 @@
                 <a:solidFill>
                   <a:srgbClr val="F3EFEB"/>
                 </a:solidFill>
-                <a:latin typeface="KingHwa_OldSong"/>
+                <a:latin typeface="Newsreader"/>
                 <a:ea typeface="京華老宋体"/>
-                <a:cs typeface="KingHwa_OldSong"/>
-              </a:rPr>
-              <a:t>把 AI 文档
-排成馆藏文稿</a:t>
+                <a:cs typeface="Newsreader"/>
+              </a:rPr>
+              <a:t>Tesla 2027
+增长与产能叙事</a:t>
             </a:r>
           </a:p>
         </p:txBody>
@@ -3558,7 +3558,7 @@
         </p:nvSpPr>
         <p:spPr>
           <a:xfrm>
-            <a:off x="1389888" y="3218688"/>
+            <a:off x="1389888" y="4133088"/>
             <a:ext cx="5705856" cy="201168"/>
           </a:xfrm>
           <a:prstGeom prst="rect">
@@ -3582,11 +3582,11 @@
                 <a:solidFill>
                   <a:srgbClr val="D5DEE7"/>
                 </a:solidFill>
-                <a:latin typeface="Source Han Sans SC"/>
-                <a:ea typeface="京華老宋体"/>
-                <a:cs typeface="Source Han Sans SC"/>
-              </a:rPr>
-              <a:t>深蓝外框 / 旧纸内页 / 档案题签</a:t>
+                <a:latin typeface="Newsreader"/>
+                <a:ea typeface="TsangerJinKai02-W04"/>
+                <a:cs typeface="Newsreader"/>
+              </a:rPr>
+              <a:t>Robotaxi / Energy / Optimus / AI Infrastructure</a:t>
             </a:r>
           </a:p>
         </p:txBody>
@@ -3599,7 +3599,7 @@
         </p:nvSpPr>
         <p:spPr>
           <a:xfrm>
-            <a:off x="7863840" y="1298448"/>
+            <a:off x="7863840" y="2231136"/>
             <a:ext cx="3154680" cy="1335024"/>
           </a:xfrm>
           <a:prstGeom prst="rect">
@@ -3623,12 +3623,12 @@
                 <a:solidFill>
                   <a:srgbClr val="4A4947"/>
                 </a:solidFill>
-                <a:latin typeface="Source Han Sans SC"/>
-                <a:ea typeface="京華老宋体"/>
-                <a:cs typeface="Source Han Sans SC"/>
-              </a:rPr>
-              <a:t>Just tell Claude what you need:
-“帮我生成一份白皮书” / “生成一份项目方案” / “帮我写一份推荐信” / “做一套汇报 slides”</a:t>
+                <a:latin typeface="Newsreader"/>
+                <a:ea typeface="TsangerJinKai02-W04"/>
+                <a:cs typeface="Newsreader"/>
+              </a:rPr>
+              <a:t>此 deck 用 republican-manuscript skill 生成。
+全部数据与图片均为 mock，用于验证 PPTX / Slidev 双产物路径。</a:t>
             </a:r>
           </a:p>
         </p:txBody>
@@ -3641,7 +3641,7 @@
         </p:nvSpPr>
         <p:spPr>
           <a:xfrm>
-            <a:off x="7863840" y="2962656"/>
+            <a:off x="7863840" y="3895344"/>
             <a:ext cx="1417320" cy="1078992"/>
           </a:xfrm>
           <a:prstGeom prst="rect">
@@ -3687,7 +3687,7 @@
         </p:nvSpPr>
         <p:spPr>
           <a:xfrm>
-            <a:off x="8028432" y="3108960"/>
+            <a:off x="8028432" y="4041648"/>
             <a:ext cx="1088136" cy="347472"/>
           </a:xfrm>
           <a:prstGeom prst="rect">
@@ -3711,11 +3711,11 @@
                 <a:solidFill>
                   <a:srgbClr val="243851"/>
                 </a:solidFill>
-                <a:latin typeface="KingHwa_OldSong"/>
+                <a:latin typeface="Newsreader"/>
                 <a:ea typeface="京華老宋体"/>
-                <a:cs typeface="KingHwa_OldSong"/>
-              </a:rPr>
-              <a:t>05</a:t>
+                <a:cs typeface="Newsreader"/>
+              </a:rPr>
+              <a:t>04</a:t>
             </a:r>
           </a:p>
         </p:txBody>
@@ -3728,7 +3728,7 @@
         </p:nvSpPr>
         <p:spPr>
           <a:xfrm>
-            <a:off x="8028432" y="3493008"/>
+            <a:off x="8028432" y="4425696"/>
             <a:ext cx="1088136" cy="164592"/>
           </a:xfrm>
           <a:prstGeom prst="rect">
@@ -3752,11 +3752,11 @@
                 <a:solidFill>
                   <a:srgbClr val="8B8782"/>
                 </a:solidFill>
-                <a:latin typeface="Source Han Sans SC"/>
-                <a:ea typeface="京華老宋体"/>
-                <a:cs typeface="Source Han Sans SC"/>
-              </a:rPr>
-              <a:t>DEMO SET</a:t>
+                <a:latin typeface="Newsreader"/>
+                <a:ea typeface="TsangerJinKai02-W04"/>
+                <a:cs typeface="Newsreader"/>
+              </a:rPr>
+              <a:t>GROWTH BETS</a:t>
             </a:r>
           </a:p>
         </p:txBody>
@@ -3769,7 +3769,7 @@
         </p:nvSpPr>
         <p:spPr>
           <a:xfrm>
-            <a:off x="8028432" y="3712464"/>
+            <a:off x="8028432" y="4645152"/>
             <a:ext cx="1088136" cy="182880"/>
           </a:xfrm>
           <a:prstGeom prst="rect">
@@ -3793,11 +3793,11 @@
                 <a:solidFill>
                   <a:srgbClr val="666361"/>
                 </a:solidFill>
-                <a:latin typeface="Source Han Sans SC"/>
-                <a:ea typeface="京華老宋体"/>
-                <a:cs typeface="Source Han Sans SC"/>
-              </a:rPr>
-              <a:t>docs + slides</a:t>
+                <a:latin typeface="Newsreader"/>
+                <a:ea typeface="TsangerJinKai02-W04"/>
+                <a:cs typeface="Newsreader"/>
+              </a:rPr>
+              <a:t>车 / 能源 / 算力 / 机器人</a:t>
             </a:r>
           </a:p>
         </p:txBody>
@@ -3810,7 +3810,7 @@
         </p:nvSpPr>
         <p:spPr>
           <a:xfrm>
-            <a:off x="9436608" y="2962656"/>
+            <a:off x="9436608" y="3895344"/>
             <a:ext cx="1417320" cy="1078992"/>
           </a:xfrm>
           <a:prstGeom prst="rect">
@@ -3856,7 +3856,7 @@
         </p:nvSpPr>
         <p:spPr>
           <a:xfrm>
-            <a:off x="9601200" y="3108960"/>
+            <a:off x="9601200" y="4041648"/>
             <a:ext cx="1088136" cy="347472"/>
           </a:xfrm>
           <a:prstGeom prst="rect">
@@ -3880,11 +3880,11 @@
                 <a:solidFill>
                   <a:srgbClr val="243851"/>
                 </a:solidFill>
-                <a:latin typeface="KingHwa_OldSong"/>
+                <a:latin typeface="Newsreader"/>
                 <a:ea typeface="京華老宋体"/>
-                <a:cs typeface="KingHwa_OldSong"/>
-              </a:rPr>
-              <a:t>01</a:t>
+                <a:cs typeface="Newsreader"/>
+              </a:rPr>
+              <a:t>08</a:t>
             </a:r>
           </a:p>
         </p:txBody>
@@ -3897,7 +3897,7 @@
         </p:nvSpPr>
         <p:spPr>
           <a:xfrm>
-            <a:off x="9601200" y="3493008"/>
+            <a:off x="9601200" y="4425696"/>
             <a:ext cx="1088136" cy="164592"/>
           </a:xfrm>
           <a:prstGeom prst="rect">
@@ -3921,11 +3921,11 @@
                 <a:solidFill>
                   <a:srgbClr val="8B8782"/>
                 </a:solidFill>
-                <a:latin typeface="Source Han Sans SC"/>
-                <a:ea typeface="京華老宋体"/>
-                <a:cs typeface="Source Han Sans SC"/>
-              </a:rPr>
-              <a:t>VISUAL RULE</a:t>
+                <a:latin typeface="Newsreader"/>
+                <a:ea typeface="TsangerJinKai02-W04"/>
+                <a:cs typeface="Newsreader"/>
+              </a:rPr>
+              <a:t>SLIDES</a:t>
             </a:r>
           </a:p>
         </p:txBody>
@@ -3938,7 +3938,7 @@
         </p:nvSpPr>
         <p:spPr>
           <a:xfrm>
-            <a:off x="9601200" y="3712464"/>
+            <a:off x="9601200" y="4645152"/>
             <a:ext cx="1088136" cy="182880"/>
           </a:xfrm>
           <a:prstGeom prst="rect">
@@ -3962,11 +3962,11 @@
                 <a:solidFill>
                   <a:srgbClr val="666361"/>
                 </a:solidFill>
-                <a:latin typeface="Source Han Sans SC"/>
-                <a:ea typeface="京華老宋体"/>
-                <a:cs typeface="Source Han Sans SC"/>
-              </a:rPr>
-              <a:t>archive blue</a:t>
+                <a:latin typeface="Newsreader"/>
+                <a:ea typeface="TsangerJinKai02-W04"/>
+                <a:cs typeface="Newsreader"/>
+              </a:rPr>
+              <a:t>dual-output deck</a:t>
             </a:r>
           </a:p>
         </p:txBody>
@@ -4004,10 +4004,10 @@
                   <a:srgbClr val="8B8782"/>
                 </a:solidFill>
                 <a:latin typeface="JetBrains Mono"/>
-                <a:ea typeface="京華老宋体"/>
+                <a:ea typeface="JetBrains Mono"/>
                 <a:cs typeface="JetBrains Mono"/>
               </a:rPr>
-              <a:t>2026.04 · KAMI FORK</a:t>
+              <a:t>2026.04 · MOCK DATA · INTERNAL DEMO</a:t>
             </a:r>
           </a:p>
         </p:txBody>
@@ -4263,10 +4263,10 @@
                   <a:srgbClr val="8B8782"/>
                 </a:solidFill>
                 <a:latin typeface="JetBrains Mono"/>
-                <a:ea typeface="京華老宋体"/>
+                <a:ea typeface="JetBrains Mono"/>
                 <a:cs typeface="JetBrains Mono"/>
               </a:rPr>
-              <a:t>METHOD</a:t>
+              <a:t>INVESTMENT THESIS</a:t>
             </a:r>
           </a:p>
         </p:txBody>
@@ -4304,7 +4304,7 @@
                   <a:srgbClr val="8B8782"/>
                 </a:solidFill>
                 <a:latin typeface="JetBrains Mono"/>
-                <a:ea typeface="京華老宋体"/>
+                <a:ea typeface="JetBrains Mono"/>
                 <a:cs typeface="JetBrains Mono"/>
               </a:rPr>
               <a:t>02 / 08</a:t>
@@ -4345,7 +4345,7 @@
                   <a:srgbClr val="8B8782"/>
                 </a:solidFill>
                 <a:latin typeface="JetBrains Mono"/>
-                <a:ea typeface="京華老宋体"/>
+                <a:ea typeface="JetBrains Mono"/>
                 <a:cs typeface="JetBrains Mono"/>
               </a:rPr>
               <a:t>01 · SECTION</a:t>
@@ -4385,11 +4385,11 @@
                 <a:solidFill>
                   <a:srgbClr val="232222"/>
                 </a:solidFill>
-                <a:latin typeface="KingHwa_OldSong"/>
+                <a:latin typeface="Newsreader"/>
                 <a:ea typeface="京華老宋体"/>
-                <a:cs typeface="KingHwa_OldSong"/>
-              </a:rPr>
-              <a:t>生成原理</a:t>
+                <a:cs typeface="Newsreader"/>
+              </a:rPr>
+              <a:t>核心判断</a:t>
             </a:r>
           </a:p>
         </p:txBody>
@@ -4461,11 +4461,11 @@
                 <a:solidFill>
                   <a:srgbClr val="666361"/>
                 </a:solidFill>
-                <a:latin typeface="Source Han Sans SC"/>
-                <a:ea typeface="京華老宋体"/>
-                <a:cs typeface="Source Han Sans SC"/>
-              </a:rPr>
-              <a:t>好看的本质不是每次重新设计，而是把内容填进稳定模板。</a:t>
+                <a:latin typeface="Newsreader"/>
+                <a:ea typeface="TsangerJinKai02-W04"/>
+                <a:cs typeface="Newsreader"/>
+              </a:rPr>
+              <a:t>Tesla 的下一阶段估值不再只由整车交付驱动，而是由制造、软件、能源与机器人四条曲线共同决定。</a:t>
             </a:r>
           </a:p>
         </p:txBody>
@@ -4503,7 +4503,7 @@
                   <a:srgbClr val="8B8782"/>
                 </a:solidFill>
                 <a:latin typeface="JetBrains Mono"/>
-                <a:ea typeface="京華老宋体"/>
+                <a:ea typeface="JetBrains Mono"/>
                 <a:cs typeface="JetBrains Mono"/>
               </a:rPr>
               <a:t>02 / 08</a:t>
@@ -4634,10 +4634,10 @@
                   <a:srgbClr val="D5DEE7"/>
                 </a:solidFill>
                 <a:latin typeface="JetBrains Mono"/>
-                <a:ea typeface="京華老宋体"/>
+                <a:ea typeface="JetBrains Mono"/>
                 <a:cs typeface="JetBrains Mono"/>
               </a:rPr>
-              <a:t>STEP 01</a:t>
+              <a:t>BET 01</a:t>
             </a:r>
           </a:p>
         </p:txBody>
@@ -4674,11 +4674,11 @@
                 <a:solidFill>
                   <a:srgbClr val="232222"/>
                 </a:solidFill>
-                <a:latin typeface="KingHwa_OldSong"/>
+                <a:latin typeface="Newsreader"/>
                 <a:ea typeface="京華老宋体"/>
-                <a:cs typeface="KingHwa_OldSong"/>
-              </a:rPr>
-              <a:t>路由</a:t>
+                <a:cs typeface="Newsreader"/>
+              </a:rPr>
+              <a:t>Robotaxi</a:t>
             </a:r>
           </a:p>
         </p:txBody>
@@ -4715,11 +4715,11 @@
                 <a:solidFill>
                   <a:srgbClr val="4A4947"/>
                 </a:solidFill>
-                <a:latin typeface="Source Han Sans SC"/>
-                <a:ea typeface="京華老宋体"/>
-                <a:cs typeface="Source Han Sans SC"/>
-              </a:rPr>
-              <a:t>先判断语言与文档类型：one-pager、long-doc、letter、slides。</a:t>
+                <a:latin typeface="Newsreader"/>
+                <a:ea typeface="TsangerJinKai02-W04"/>
+                <a:cs typeface="Newsreader"/>
+              </a:rPr>
+              <a:t>把 FSD 资产从一次性卖车收入，转换成持续运营收入。</a:t>
             </a:r>
           </a:p>
         </p:txBody>
@@ -4847,10 +4847,10 @@
                   <a:srgbClr val="D5DEE7"/>
                 </a:solidFill>
                 <a:latin typeface="JetBrains Mono"/>
-                <a:ea typeface="京華老宋体"/>
+                <a:ea typeface="JetBrains Mono"/>
                 <a:cs typeface="JetBrains Mono"/>
               </a:rPr>
-              <a:t>STEP 02</a:t>
+              <a:t>BET 02</a:t>
             </a:r>
           </a:p>
         </p:txBody>
@@ -4887,11 +4887,11 @@
                 <a:solidFill>
                   <a:srgbClr val="232222"/>
                 </a:solidFill>
-                <a:latin typeface="KingHwa_OldSong"/>
+                <a:latin typeface="Newsreader"/>
                 <a:ea typeface="京華老宋体"/>
-                <a:cs typeface="KingHwa_OldSong"/>
-              </a:rPr>
-              <a:t>整理</a:t>
+                <a:cs typeface="Newsreader"/>
+              </a:rPr>
+              <a:t>Energy</a:t>
             </a:r>
           </a:p>
         </p:txBody>
@@ -4928,11 +4928,11 @@
                 <a:solidFill>
                   <a:srgbClr val="4A4947"/>
                 </a:solidFill>
-                <a:latin typeface="Source Han Sans SC"/>
-                <a:ea typeface="京華老宋体"/>
-                <a:cs typeface="Source Han Sans SC"/>
-              </a:rPr>
-              <a:t>把 raw material 拆成事实、数字、判断和行动，而不是直接堆文字。</a:t>
+                <a:latin typeface="Newsreader"/>
+                <a:ea typeface="TsangerJinKai02-W04"/>
+                <a:cs typeface="Newsreader"/>
+              </a:rPr>
+              <a:t>储能业务用更稳定的交付节奏，平衡汽车周期波动。</a:t>
             </a:r>
           </a:p>
         </p:txBody>
@@ -5060,10 +5060,10 @@
                   <a:srgbClr val="D5DEE7"/>
                 </a:solidFill>
                 <a:latin typeface="JetBrains Mono"/>
-                <a:ea typeface="京華老宋体"/>
+                <a:ea typeface="JetBrains Mono"/>
                 <a:cs typeface="JetBrains Mono"/>
               </a:rPr>
-              <a:t>STEP 03</a:t>
+              <a:t>BET 03</a:t>
             </a:r>
           </a:p>
         </p:txBody>
@@ -5100,11 +5100,11 @@
                 <a:solidFill>
                   <a:srgbClr val="232222"/>
                 </a:solidFill>
-                <a:latin typeface="KingHwa_OldSong"/>
+                <a:latin typeface="Newsreader"/>
                 <a:ea typeface="京華老宋体"/>
-                <a:cs typeface="KingHwa_OldSong"/>
-              </a:rPr>
-              <a:t>填充</a:t>
+                <a:cs typeface="Newsreader"/>
+              </a:rPr>
+              <a:t>Factory OS</a:t>
             </a:r>
           </a:p>
         </p:txBody>
@@ -5141,11 +5141,11 @@
                 <a:solidFill>
                   <a:srgbClr val="4A4947"/>
                 </a:solidFill>
-                <a:latin typeface="Source Han Sans SC"/>
-                <a:ea typeface="京華老宋体"/>
-                <a:cs typeface="Source Han Sans SC"/>
-              </a:rPr>
-              <a:t>使用固定骨架承载内容，避免 AI 每次自由发挥版式。</a:t>
+                <a:latin typeface="Newsreader"/>
+                <a:ea typeface="TsangerJinKai02-W04"/>
+                <a:cs typeface="Newsreader"/>
+              </a:rPr>
+              <a:t>上海与得州工厂共享工艺、软件和供应链缓冲带。</a:t>
             </a:r>
           </a:p>
         </p:txBody>
@@ -5273,10 +5273,10 @@
                   <a:srgbClr val="D5DEE7"/>
                 </a:solidFill>
                 <a:latin typeface="JetBrains Mono"/>
-                <a:ea typeface="京華老宋体"/>
+                <a:ea typeface="JetBrains Mono"/>
                 <a:cs typeface="JetBrains Mono"/>
               </a:rPr>
-              <a:t>STEP 04</a:t>
+              <a:t>BET 04</a:t>
             </a:r>
           </a:p>
         </p:txBody>
@@ -5313,11 +5313,11 @@
                 <a:solidFill>
                   <a:srgbClr val="232222"/>
                 </a:solidFill>
-                <a:latin typeface="KingHwa_OldSong"/>
+                <a:latin typeface="Newsreader"/>
                 <a:ea typeface="京華老宋体"/>
-                <a:cs typeface="KingHwa_OldSong"/>
-              </a:rPr>
-              <a:t>校验</a:t>
+                <a:cs typeface="Newsreader"/>
+              </a:rPr>
+              <a:t>Optimus</a:t>
             </a:r>
           </a:p>
         </p:txBody>
@@ -5354,11 +5354,11 @@
                 <a:solidFill>
                   <a:srgbClr val="4A4947"/>
                 </a:solidFill>
-                <a:latin typeface="Source Han Sans SC"/>
-                <a:ea typeface="京華老宋体"/>
-                <a:cs typeface="Source Han Sans SC"/>
-              </a:rPr>
-              <a:t>构建脚本检查页数、字体、占位符与 CSS 约束。</a:t>
+                <a:latin typeface="Newsreader"/>
+                <a:ea typeface="TsangerJinKai02-W04"/>
+                <a:cs typeface="Newsreader"/>
+              </a:rPr>
+              <a:t>机器人先在自家工厂落地，再逐步外溢到物流与服务。</a:t>
             </a:r>
           </a:p>
         </p:txBody>
@@ -5395,11 +5395,11 @@
                 <a:solidFill>
                   <a:srgbClr val="243851"/>
                 </a:solidFill>
-                <a:latin typeface="KingHwa_OldSong"/>
+                <a:latin typeface="Newsreader"/>
                 <a:ea typeface="京華老宋体"/>
-                <a:cs typeface="KingHwa_OldSong"/>
-              </a:rPr>
-              <a:t>固定版式 + design token + 字体层级 + 构建校验</a:t>
+                <a:cs typeface="Newsreader"/>
+              </a:rPr>
+              <a:t>四条曲线共用电池、算力、软件与工厂资产。</a:t>
             </a:r>
           </a:p>
         </p:txBody>
@@ -5655,10 +5655,10 @@
                   <a:srgbClr val="8B8782"/>
                 </a:solidFill>
                 <a:latin typeface="JetBrains Mono"/>
-                <a:ea typeface="京華老宋体"/>
+                <a:ea typeface="JetBrains Mono"/>
                 <a:cs typeface="JetBrains Mono"/>
               </a:rPr>
-              <a:t>DESIGN TOKENS</a:t>
+              <a:t>OPERATIONS</a:t>
             </a:r>
           </a:p>
         </p:txBody>
@@ -5696,7 +5696,7 @@
                   <a:srgbClr val="8B8782"/>
                 </a:solidFill>
                 <a:latin typeface="JetBrains Mono"/>
-                <a:ea typeface="京華老宋体"/>
+                <a:ea typeface="JetBrains Mono"/>
                 <a:cs typeface="JetBrains Mono"/>
               </a:rPr>
               <a:t>03 / 08</a:t>
@@ -5737,7 +5737,7 @@
                   <a:srgbClr val="8B8782"/>
                 </a:solidFill>
                 <a:latin typeface="JetBrains Mono"/>
-                <a:ea typeface="京華老宋体"/>
+                <a:ea typeface="JetBrains Mono"/>
                 <a:cs typeface="JetBrains Mono"/>
               </a:rPr>
               <a:t>02 · SECTION</a:t>
@@ -5777,11 +5777,11 @@
                 <a:solidFill>
                   <a:srgbClr val="232222"/>
                 </a:solidFill>
-                <a:latin typeface="KingHwa_OldSong"/>
+                <a:latin typeface="Newsreader"/>
                 <a:ea typeface="京華老宋体"/>
-                <a:cs typeface="KingHwa_OldSong"/>
-              </a:rPr>
-              <a:t>民国文稿视觉语言</a:t>
+                <a:cs typeface="Newsreader"/>
+              </a:rPr>
+              <a:t>上海与得州进入同屏扩产期</a:t>
             </a:r>
           </a:p>
         </p:txBody>
@@ -5853,11 +5853,11 @@
                 <a:solidFill>
                   <a:srgbClr val="666361"/>
                 </a:solidFill>
-                <a:latin typeface="Source Han Sans SC"/>
-                <a:ea typeface="京華老宋体"/>
-                <a:cs typeface="Source Han Sans SC"/>
-              </a:rPr>
-              <a:t>不做复古海报，不做重纹理，只把专业文档整理成被认真归档过的样子。</a:t>
+                <a:latin typeface="Newsreader"/>
+                <a:ea typeface="TsangerJinKai02-W04"/>
+                <a:cs typeface="Newsreader"/>
+              </a:rPr>
+              <a:t>Mock 逻辑：一个工厂守住成本，一个工厂承接新平台切换，产能结构比单纯冲量更重要。</a:t>
             </a:r>
           </a:p>
         </p:txBody>
@@ -5895,7 +5895,7 @@
                   <a:srgbClr val="8B8782"/>
                 </a:solidFill>
                 <a:latin typeface="JetBrains Mono"/>
-                <a:ea typeface="京華老宋体"/>
+                <a:ea typeface="JetBrains Mono"/>
                 <a:cs typeface="JetBrains Mono"/>
               </a:rPr>
               <a:t>03 / 08</a:t>
@@ -5911,18 +5911,18 @@
         </p:nvSpPr>
         <p:spPr>
           <a:xfrm>
-            <a:off x="1097280" y="2350008"/>
-            <a:ext cx="2011680" cy="1051560"/>
+            <a:off x="1097280" y="2231136"/>
+            <a:ext cx="5577840" cy="3054096"/>
           </a:xfrm>
           <a:prstGeom prst="rect">
             <a:avLst/>
           </a:prstGeom>
           <a:solidFill>
-            <a:srgbClr val="243851"/>
+            <a:srgbClr val="F3EFEB"/>
           </a:solidFill>
-          <a:ln w="6350">
+          <a:ln w="8890">
             <a:solidFill>
-              <a:srgbClr val="F3EFEB"/>
+              <a:srgbClr val="4D5B6D"/>
             </a:solidFill>
           </a:ln>
           <a:effectLst/>
@@ -5949,16 +5949,40 @@
           </a:p>
         </p:txBody>
       </p:sp>
-      <p:sp>
-        <p:nvSpPr>
-          <p:cNvPr id="15" name="TextBox 14"/>
+      <p:pic>
+        <p:nvPicPr>
+          <p:cNvPr id="15" name="Picture 14" descr="mock-tesla-factory.png"/>
+          <p:cNvPicPr>
+            <a:picLocks noChangeAspect="1"/>
+          </p:cNvPicPr>
+          <p:nvPr/>
+        </p:nvPicPr>
+        <p:blipFill>
+          <a:blip r:embed="rId3"/>
+          <a:stretch>
+            <a:fillRect/>
+          </a:stretch>
+        </p:blipFill>
+        <p:spPr>
+          <a:xfrm>
+            <a:off x="1097280" y="2231136"/>
+            <a:ext cx="5577840" cy="2706624"/>
+          </a:xfrm>
+          <a:prstGeom prst="rect">
+            <a:avLst/>
+          </a:prstGeom>
+        </p:spPr>
+      </p:pic>
+      <p:sp>
+        <p:nvSpPr>
+          <p:cNvPr id="16" name="TextBox 15"/>
           <p:cNvSpPr txBox="1"/>
           <p:nvPr/>
         </p:nvSpPr>
         <p:spPr>
           <a:xfrm>
-            <a:off x="1097280" y="3584448"/>
-            <a:ext cx="2011680" cy="182880"/>
+            <a:off x="1261872" y="4992624"/>
+            <a:ext cx="5248656" cy="146304"/>
           </a:xfrm>
           <a:prstGeom prst="rect">
             <a:avLst/>
@@ -5971,125 +5995,43 @@
           </a:bodyPr>
           <a:lstStyle/>
           <a:p>
-            <a:pPr algn="ctr">
+            <a:pPr algn="l">
               <a:lnSpc>
                 <a:spcPct val="100000"/>
               </a:lnSpc>
             </a:pPr>
             <a:r>
-              <a:rPr sz="800" b="0">
+              <a:rPr sz="750" b="0">
                 <a:solidFill>
                   <a:srgbClr val="8B8782"/>
                 </a:solidFill>
                 <a:latin typeface="JetBrains Mono"/>
-                <a:ea typeface="京華老宋体"/>
+                <a:ea typeface="JetBrains Mono"/>
                 <a:cs typeface="JetBrains Mono"/>
               </a:rPr>
-              <a:t>ARCHIVE BLUE</a:t>
-            </a:r>
-          </a:p>
-        </p:txBody>
-      </p:sp>
-      <p:sp>
-        <p:nvSpPr>
-          <p:cNvPr id="16" name="TextBox 15"/>
-          <p:cNvSpPr txBox="1"/>
-          <p:nvPr/>
-        </p:nvSpPr>
-        <p:spPr>
-          <a:xfrm>
-            <a:off x="1097280" y="3858768"/>
-            <a:ext cx="2011680" cy="228600"/>
-          </a:xfrm>
-          <a:prstGeom prst="rect">
-            <a:avLst/>
-          </a:prstGeom>
-          <a:noFill/>
-        </p:spPr>
-        <p:txBody>
-          <a:bodyPr wrap="square" lIns="0" rIns="0" tIns="0" bIns="0" anchor="t">
-            <a:spAutoFit/>
-          </a:bodyPr>
-          <a:lstStyle/>
-          <a:p>
-            <a:pPr algn="ctr">
-              <a:lnSpc>
-                <a:spcPct val="100000"/>
-              </a:lnSpc>
-            </a:pPr>
-            <a:r>
-              <a:rPr sz="1500" b="0">
-                <a:solidFill>
-                  <a:srgbClr val="243851"/>
-                </a:solidFill>
-                <a:latin typeface="KingHwa_OldSong"/>
-                <a:ea typeface="京華老宋体"/>
-                <a:cs typeface="KingHwa_OldSong"/>
-              </a:rPr>
-              <a:t>#243851</a:t>
-            </a:r>
-          </a:p>
-        </p:txBody>
-      </p:sp>
-      <p:sp>
-        <p:nvSpPr>
-          <p:cNvPr id="17" name="TextBox 16"/>
-          <p:cNvSpPr txBox="1"/>
-          <p:nvPr/>
-        </p:nvSpPr>
-        <p:spPr>
-          <a:xfrm>
-            <a:off x="1097280" y="4160520"/>
-            <a:ext cx="2011680" cy="219456"/>
-          </a:xfrm>
-          <a:prstGeom prst="rect">
-            <a:avLst/>
-          </a:prstGeom>
-          <a:noFill/>
-        </p:spPr>
-        <p:txBody>
-          <a:bodyPr wrap="square" lIns="0" rIns="0" tIns="0" bIns="0" anchor="t">
-            <a:spAutoFit/>
-          </a:bodyPr>
-          <a:lstStyle/>
-          <a:p>
-            <a:pPr algn="ctr">
-              <a:lnSpc>
-                <a:spcPct val="100000"/>
-              </a:lnSpc>
-            </a:pPr>
-            <a:r>
-              <a:rPr sz="900" b="0">
-                <a:solidFill>
-                  <a:srgbClr val="666361"/>
-                </a:solidFill>
-                <a:latin typeface="Source Han Sans SC"/>
-                <a:ea typeface="京華老宋体"/>
-                <a:cs typeface="Source Han Sans SC"/>
-              </a:rPr>
-              <a:t>外框 / 题签 / 强调</a:t>
-            </a:r>
-          </a:p>
-        </p:txBody>
-      </p:sp>
-      <p:sp>
-        <p:nvSpPr>
-          <p:cNvPr id="18" name="Rectangle 17"/>
+              <a:t>MOCK VISUAL · 双工厂协同示意</a:t>
+            </a:r>
+          </a:p>
+        </p:txBody>
+      </p:sp>
+      <p:sp>
+        <p:nvSpPr>
+          <p:cNvPr id="17" name="Rectangle 16"/>
           <p:cNvSpPr/>
           <p:nvPr/>
         </p:nvSpPr>
         <p:spPr>
           <a:xfrm>
-            <a:off x="3657600" y="2350008"/>
-            <a:ext cx="2011680" cy="1051560"/>
+            <a:off x="6949440" y="2304288"/>
+            <a:ext cx="1901952" cy="1078992"/>
           </a:xfrm>
           <a:prstGeom prst="rect">
             <a:avLst/>
           </a:prstGeom>
           <a:solidFill>
-            <a:srgbClr val="EBE5DD"/>
+            <a:srgbClr val="F3EFEB"/>
           </a:solidFill>
-          <a:ln w="6350">
+          <a:ln w="10160">
             <a:solidFill>
               <a:srgbClr val="4D5B6D"/>
             </a:solidFill>
@@ -6120,14 +6062,14 @@
       </p:sp>
       <p:sp>
         <p:nvSpPr>
-          <p:cNvPr id="19" name="TextBox 18"/>
+          <p:cNvPr id="18" name="TextBox 17"/>
           <p:cNvSpPr txBox="1"/>
           <p:nvPr/>
         </p:nvSpPr>
         <p:spPr>
           <a:xfrm>
-            <a:off x="3657600" y="3584448"/>
-            <a:ext cx="2011680" cy="182880"/>
+            <a:off x="7114032" y="2450592"/>
+            <a:ext cx="1572768" cy="347472"/>
           </a:xfrm>
           <a:prstGeom prst="rect">
             <a:avLst/>
@@ -6140,35 +6082,35 @@
           </a:bodyPr>
           <a:lstStyle/>
           <a:p>
-            <a:pPr algn="ctr">
+            <a:pPr algn="l">
               <a:lnSpc>
                 <a:spcPct val="100000"/>
               </a:lnSpc>
             </a:pPr>
             <a:r>
-              <a:rPr sz="800" b="0">
-                <a:solidFill>
-                  <a:srgbClr val="8B8782"/>
-                </a:solidFill>
-                <a:latin typeface="JetBrains Mono"/>
+              <a:rPr sz="2400" b="0">
+                <a:solidFill>
+                  <a:srgbClr val="243851"/>
+                </a:solidFill>
+                <a:latin typeface="Newsreader"/>
                 <a:ea typeface="京華老宋体"/>
-                <a:cs typeface="JetBrains Mono"/>
-              </a:rPr>
-              <a:t>OLD PAPER</a:t>
-            </a:r>
-          </a:p>
-        </p:txBody>
-      </p:sp>
-      <p:sp>
-        <p:nvSpPr>
-          <p:cNvPr id="20" name="TextBox 19"/>
+                <a:cs typeface="Newsreader"/>
+              </a:rPr>
+              <a:t>5.8M</a:t>
+            </a:r>
+          </a:p>
+        </p:txBody>
+      </p:sp>
+      <p:sp>
+        <p:nvSpPr>
+          <p:cNvPr id="19" name="TextBox 18"/>
           <p:cNvSpPr txBox="1"/>
           <p:nvPr/>
         </p:nvSpPr>
         <p:spPr>
           <a:xfrm>
-            <a:off x="3657600" y="3858768"/>
-            <a:ext cx="2011680" cy="228600"/>
+            <a:off x="7114032" y="2834640"/>
+            <a:ext cx="1572768" cy="164592"/>
           </a:xfrm>
           <a:prstGeom prst="rect">
             <a:avLst/>
@@ -6181,35 +6123,35 @@
           </a:bodyPr>
           <a:lstStyle/>
           <a:p>
-            <a:pPr algn="ctr">
+            <a:pPr algn="l">
               <a:lnSpc>
                 <a:spcPct val="100000"/>
               </a:lnSpc>
             </a:pPr>
             <a:r>
-              <a:rPr sz="1500" b="0">
-                <a:solidFill>
-                  <a:srgbClr val="243851"/>
-                </a:solidFill>
-                <a:latin typeface="KingHwa_OldSong"/>
-                <a:ea typeface="京華老宋体"/>
-                <a:cs typeface="KingHwa_OldSong"/>
-              </a:rPr>
-              <a:t>#EBE5DD</a:t>
-            </a:r>
-          </a:p>
-        </p:txBody>
-      </p:sp>
-      <p:sp>
-        <p:nvSpPr>
-          <p:cNvPr id="21" name="TextBox 20"/>
+              <a:rPr sz="850" b="0">
+                <a:solidFill>
+                  <a:srgbClr val="8B8782"/>
+                </a:solidFill>
+                <a:latin typeface="Newsreader"/>
+                <a:ea typeface="TsangerJinKai02-W04"/>
+                <a:cs typeface="Newsreader"/>
+              </a:rPr>
+              <a:t>年化产能</a:t>
+            </a:r>
+          </a:p>
+        </p:txBody>
+      </p:sp>
+      <p:sp>
+        <p:nvSpPr>
+          <p:cNvPr id="20" name="TextBox 19"/>
           <p:cNvSpPr txBox="1"/>
           <p:nvPr/>
         </p:nvSpPr>
         <p:spPr>
           <a:xfrm>
-            <a:off x="3657600" y="4160520"/>
-            <a:ext cx="2011680" cy="219456"/>
+            <a:off x="7114032" y="3054096"/>
+            <a:ext cx="1572768" cy="182880"/>
           </a:xfrm>
           <a:prstGeom prst="rect">
             <a:avLst/>
@@ -6222,35 +6164,35 @@
           </a:bodyPr>
           <a:lstStyle/>
           <a:p>
-            <a:pPr algn="ctr">
+            <a:pPr algn="l">
               <a:lnSpc>
                 <a:spcPct val="100000"/>
               </a:lnSpc>
             </a:pPr>
             <a:r>
-              <a:rPr sz="900" b="0">
+              <a:rPr sz="850" b="0">
                 <a:solidFill>
                   <a:srgbClr val="666361"/>
                 </a:solidFill>
-                <a:latin typeface="Source Han Sans SC"/>
-                <a:ea typeface="京華老宋体"/>
-                <a:cs typeface="Source Han Sans SC"/>
-              </a:rPr>
-              <a:t>正文纸面</a:t>
-            </a:r>
-          </a:p>
-        </p:txBody>
-      </p:sp>
-      <p:sp>
-        <p:nvSpPr>
-          <p:cNvPr id="22" name="Rectangle 21"/>
+                <a:latin typeface="Newsreader"/>
+                <a:ea typeface="TsangerJinKai02-W04"/>
+                <a:cs typeface="Newsreader"/>
+              </a:rPr>
+              <a:t>两地产线合计</a:t>
+            </a:r>
+          </a:p>
+        </p:txBody>
+      </p:sp>
+      <p:sp>
+        <p:nvSpPr>
+          <p:cNvPr id="21" name="Rectangle 20"/>
           <p:cNvSpPr/>
           <p:nvPr/>
         </p:nvSpPr>
         <p:spPr>
           <a:xfrm>
-            <a:off x="6217920" y="2350008"/>
-            <a:ext cx="2011680" cy="1051560"/>
+            <a:off x="9015984" y="2304288"/>
+            <a:ext cx="1901952" cy="1078992"/>
           </a:xfrm>
           <a:prstGeom prst="rect">
             <a:avLst/>
@@ -6258,7 +6200,7 @@
           <a:solidFill>
             <a:srgbClr val="F3EFEB"/>
           </a:solidFill>
-          <a:ln w="6350">
+          <a:ln w="10160">
             <a:solidFill>
               <a:srgbClr val="4D5B6D"/>
             </a:solidFill>
@@ -6289,14 +6231,14 @@
       </p:sp>
       <p:sp>
         <p:nvSpPr>
-          <p:cNvPr id="23" name="TextBox 22"/>
+          <p:cNvPr id="22" name="TextBox 21"/>
           <p:cNvSpPr txBox="1"/>
           <p:nvPr/>
         </p:nvSpPr>
         <p:spPr>
           <a:xfrm>
-            <a:off x="6217920" y="3584448"/>
-            <a:ext cx="2011680" cy="182880"/>
+            <a:off x="9180576" y="2450592"/>
+            <a:ext cx="1572768" cy="347472"/>
           </a:xfrm>
           <a:prstGeom prst="rect">
             <a:avLst/>
@@ -6309,35 +6251,35 @@
           </a:bodyPr>
           <a:lstStyle/>
           <a:p>
-            <a:pPr algn="ctr">
+            <a:pPr algn="l">
               <a:lnSpc>
                 <a:spcPct val="100000"/>
               </a:lnSpc>
             </a:pPr>
             <a:r>
-              <a:rPr sz="800" b="0">
-                <a:solidFill>
-                  <a:srgbClr val="8B8782"/>
-                </a:solidFill>
-                <a:latin typeface="JetBrains Mono"/>
+              <a:rPr sz="2400" b="0">
+                <a:solidFill>
+                  <a:srgbClr val="243851"/>
+                </a:solidFill>
+                <a:latin typeface="Newsreader"/>
                 <a:ea typeface="京華老宋体"/>
-                <a:cs typeface="JetBrains Mono"/>
-              </a:rPr>
-              <a:t>IVORY</a:t>
-            </a:r>
-          </a:p>
-        </p:txBody>
-      </p:sp>
-      <p:sp>
-        <p:nvSpPr>
-          <p:cNvPr id="24" name="TextBox 23"/>
+                <a:cs typeface="Newsreader"/>
+              </a:rPr>
+              <a:t>41d</a:t>
+            </a:r>
+          </a:p>
+        </p:txBody>
+      </p:sp>
+      <p:sp>
+        <p:nvSpPr>
+          <p:cNvPr id="23" name="TextBox 22"/>
           <p:cNvSpPr txBox="1"/>
           <p:nvPr/>
         </p:nvSpPr>
         <p:spPr>
           <a:xfrm>
-            <a:off x="6217920" y="3858768"/>
-            <a:ext cx="2011680" cy="228600"/>
+            <a:off x="9180576" y="2834640"/>
+            <a:ext cx="1572768" cy="164592"/>
           </a:xfrm>
           <a:prstGeom prst="rect">
             <a:avLst/>
@@ -6350,35 +6292,35 @@
           </a:bodyPr>
           <a:lstStyle/>
           <a:p>
-            <a:pPr algn="ctr">
+            <a:pPr algn="l">
               <a:lnSpc>
                 <a:spcPct val="100000"/>
               </a:lnSpc>
             </a:pPr>
             <a:r>
-              <a:rPr sz="1500" b="0">
-                <a:solidFill>
-                  <a:srgbClr val="243851"/>
-                </a:solidFill>
-                <a:latin typeface="KingHwa_OldSong"/>
-                <a:ea typeface="京華老宋体"/>
-                <a:cs typeface="KingHwa_OldSong"/>
-              </a:rPr>
-              <a:t>#F3EFEB</a:t>
-            </a:r>
-          </a:p>
-        </p:txBody>
-      </p:sp>
-      <p:sp>
-        <p:nvSpPr>
-          <p:cNvPr id="25" name="TextBox 24"/>
+              <a:rPr sz="850" b="0">
+                <a:solidFill>
+                  <a:srgbClr val="8B8782"/>
+                </a:solidFill>
+                <a:latin typeface="Newsreader"/>
+                <a:ea typeface="TsangerJinKai02-W04"/>
+                <a:cs typeface="Newsreader"/>
+              </a:rPr>
+              <a:t>在制周转</a:t>
+            </a:r>
+          </a:p>
+        </p:txBody>
+      </p:sp>
+      <p:sp>
+        <p:nvSpPr>
+          <p:cNvPr id="24" name="TextBox 23"/>
           <p:cNvSpPr txBox="1"/>
           <p:nvPr/>
         </p:nvSpPr>
         <p:spPr>
           <a:xfrm>
-            <a:off x="6217920" y="4160520"/>
-            <a:ext cx="2011680" cy="219456"/>
+            <a:off x="9180576" y="3054096"/>
+            <a:ext cx="1572768" cy="182880"/>
           </a:xfrm>
           <a:prstGeom prst="rect">
             <a:avLst/>
@@ -6391,318 +6333,107 @@
           </a:bodyPr>
           <a:lstStyle/>
           <a:p>
-            <a:pPr algn="ctr">
+            <a:pPr algn="l">
               <a:lnSpc>
                 <a:spcPct val="100000"/>
               </a:lnSpc>
             </a:pPr>
             <a:r>
-              <a:rPr sz="900" b="0">
+              <a:rPr sz="850" b="0">
                 <a:solidFill>
                   <a:srgbClr val="666361"/>
                 </a:solidFill>
-                <a:latin typeface="Source Han Sans SC"/>
-                <a:ea typeface="京華老宋体"/>
-                <a:cs typeface="Source Han Sans SC"/>
-              </a:rPr>
-              <a:t>卡片与浮层</a:t>
-            </a:r>
-          </a:p>
-        </p:txBody>
-      </p:sp>
-      <p:sp>
-        <p:nvSpPr>
-          <p:cNvPr id="26" name="Rectangle 25"/>
-          <p:cNvSpPr/>
-          <p:nvPr/>
-        </p:nvSpPr>
-        <p:spPr>
-          <a:xfrm>
-            <a:off x="8778240" y="2350008"/>
-            <a:ext cx="2011680" cy="1051560"/>
-          </a:xfrm>
-          <a:prstGeom prst="rect">
-            <a:avLst/>
-          </a:prstGeom>
-          <a:solidFill>
-            <a:srgbClr val="D0C7BB"/>
-          </a:solidFill>
-          <a:ln w="6350">
-            <a:solidFill>
-              <a:srgbClr val="4D5B6D"/>
-            </a:solidFill>
-          </a:ln>
-          <a:effectLst/>
-        </p:spPr>
-        <p:style>
-          <a:lnRef idx="1">
-            <a:schemeClr val="accent1"/>
-          </a:lnRef>
-          <a:fillRef idx="3">
-            <a:schemeClr val="accent1"/>
-          </a:fillRef>
-          <a:effectRef idx="2">
-            <a:schemeClr val="accent1"/>
-          </a:effectRef>
-          <a:fontRef idx="minor">
-            <a:schemeClr val="lt1"/>
-          </a:fontRef>
-        </p:style>
-        <p:txBody>
-          <a:bodyPr rtlCol="0" anchor="ctr"/>
-          <a:lstStyle/>
-          <a:p>
-            <a:pPr algn="ctr"/>
-          </a:p>
-        </p:txBody>
-      </p:sp>
-      <p:sp>
-        <p:nvSpPr>
-          <p:cNvPr id="27" name="TextBox 26"/>
+                <a:latin typeface="Newsreader"/>
+                <a:ea typeface="TsangerJinKai02-W04"/>
+                <a:cs typeface="Newsreader"/>
+              </a:rPr>
+              <a:t>切换期目标</a:t>
+            </a:r>
+          </a:p>
+        </p:txBody>
+      </p:sp>
+      <p:sp>
+        <p:nvSpPr>
+          <p:cNvPr id="25" name="TextBox 24"/>
           <p:cNvSpPr txBox="1"/>
           <p:nvPr/>
         </p:nvSpPr>
         <p:spPr>
           <a:xfrm>
-            <a:off x="8778240" y="3584448"/>
-            <a:ext cx="2011680" cy="182880"/>
-          </a:xfrm>
-          <a:prstGeom prst="rect">
-            <a:avLst/>
-          </a:prstGeom>
-          <a:noFill/>
-        </p:spPr>
-        <p:txBody>
-          <a:bodyPr wrap="square" lIns="0" rIns="0" tIns="0" bIns="0" anchor="t">
+            <a:off x="6949440" y="3785616"/>
+            <a:ext cx="3749039" cy="1481328"/>
+          </a:xfrm>
+          <a:prstGeom prst="rect">
+            <a:avLst/>
+          </a:prstGeom>
+          <a:noFill/>
+        </p:spPr>
+        <p:txBody>
+          <a:bodyPr wrap="square" lIns="0" rIns="0" tIns="0" bIns="0">
             <a:spAutoFit/>
           </a:bodyPr>
           <a:lstStyle/>
           <a:p>
-            <a:pPr algn="ctr">
-              <a:lnSpc>
-                <a:spcPct val="100000"/>
-              </a:lnSpc>
-            </a:pPr>
-            <a:r>
-              <a:rPr sz="800" b="0">
-                <a:solidFill>
-                  <a:srgbClr val="8B8782"/>
-                </a:solidFill>
-                <a:latin typeface="JetBrains Mono"/>
-                <a:ea typeface="京華老宋体"/>
-                <a:cs typeface="JetBrains Mono"/>
-              </a:rPr>
-              <a:t>BORDER</a:t>
-            </a:r>
-          </a:p>
-        </p:txBody>
-      </p:sp>
-      <p:sp>
-        <p:nvSpPr>
-          <p:cNvPr id="28" name="TextBox 27"/>
-          <p:cNvSpPr txBox="1"/>
-          <p:nvPr/>
-        </p:nvSpPr>
-        <p:spPr>
-          <a:xfrm>
-            <a:off x="8778240" y="3858768"/>
-            <a:ext cx="2011680" cy="228600"/>
-          </a:xfrm>
-          <a:prstGeom prst="rect">
-            <a:avLst/>
-          </a:prstGeom>
-          <a:noFill/>
-        </p:spPr>
-        <p:txBody>
-          <a:bodyPr wrap="square" lIns="0" rIns="0" tIns="0" bIns="0" anchor="t">
-            <a:spAutoFit/>
-          </a:bodyPr>
-          <a:lstStyle/>
-          <a:p>
-            <a:pPr algn="ctr">
-              <a:lnSpc>
-                <a:spcPct val="100000"/>
-              </a:lnSpc>
-            </a:pPr>
-            <a:r>
-              <a:rPr sz="1500" b="0">
-                <a:solidFill>
-                  <a:srgbClr val="243851"/>
-                </a:solidFill>
-                <a:latin typeface="KingHwa_OldSong"/>
-                <a:ea typeface="京華老宋体"/>
-                <a:cs typeface="KingHwa_OldSong"/>
-              </a:rPr>
-              <a:t>#D0C7BB</a:t>
-            </a:r>
-          </a:p>
-        </p:txBody>
-      </p:sp>
-      <p:sp>
-        <p:nvSpPr>
-          <p:cNvPr id="29" name="TextBox 28"/>
-          <p:cNvSpPr txBox="1"/>
-          <p:nvPr/>
-        </p:nvSpPr>
-        <p:spPr>
-          <a:xfrm>
-            <a:off x="8778240" y="4160520"/>
-            <a:ext cx="2011680" cy="219456"/>
-          </a:xfrm>
-          <a:prstGeom prst="rect">
-            <a:avLst/>
-          </a:prstGeom>
-          <a:noFill/>
-        </p:spPr>
-        <p:txBody>
-          <a:bodyPr wrap="square" lIns="0" rIns="0" tIns="0" bIns="0" anchor="t">
-            <a:spAutoFit/>
-          </a:bodyPr>
-          <a:lstStyle/>
-          <a:p>
-            <a:pPr algn="ctr">
-              <a:lnSpc>
-                <a:spcPct val="100000"/>
-              </a:lnSpc>
-            </a:pPr>
-            <a:r>
-              <a:rPr sz="900" b="0">
-                <a:solidFill>
-                  <a:srgbClr val="666361"/>
-                </a:solidFill>
-                <a:latin typeface="Source Han Sans SC"/>
-                <a:ea typeface="京華老宋体"/>
-                <a:cs typeface="Source Han Sans SC"/>
-              </a:rPr>
-              <a:t>细线和分隔</a:t>
-            </a:r>
-          </a:p>
-        </p:txBody>
-      </p:sp>
-      <p:sp>
-        <p:nvSpPr>
-          <p:cNvPr id="30" name="Rectangle 29"/>
-          <p:cNvSpPr/>
-          <p:nvPr/>
-        </p:nvSpPr>
-        <p:spPr>
-          <a:xfrm>
-            <a:off x="1481328" y="5001768"/>
-            <a:ext cx="9601200" cy="804672"/>
-          </a:xfrm>
-          <a:prstGeom prst="rect">
-            <a:avLst/>
-          </a:prstGeom>
-          <a:solidFill>
-            <a:srgbClr val="F3EFEB"/>
-          </a:solidFill>
-          <a:ln w="8890">
-            <a:solidFill>
-              <a:srgbClr val="D0C7BB"/>
-            </a:solidFill>
-          </a:ln>
-          <a:effectLst/>
-        </p:spPr>
-        <p:style>
-          <a:lnRef idx="1">
-            <a:schemeClr val="accent1"/>
-          </a:lnRef>
-          <a:fillRef idx="3">
-            <a:schemeClr val="accent1"/>
-          </a:fillRef>
-          <a:effectRef idx="2">
-            <a:schemeClr val="accent1"/>
-          </a:effectRef>
-          <a:fontRef idx="minor">
-            <a:schemeClr val="lt1"/>
-          </a:fontRef>
-        </p:style>
-        <p:txBody>
-          <a:bodyPr rtlCol="0" anchor="ctr"/>
-          <a:lstStyle/>
-          <a:p>
-            <a:pPr algn="ctr"/>
-          </a:p>
-        </p:txBody>
-      </p:sp>
-      <p:sp>
-        <p:nvSpPr>
-          <p:cNvPr id="31" name="TextBox 30"/>
-          <p:cNvSpPr txBox="1"/>
-          <p:nvPr/>
-        </p:nvSpPr>
-        <p:spPr>
-          <a:xfrm>
-            <a:off x="1664208" y="5221224"/>
-            <a:ext cx="9235440" cy="310896"/>
-          </a:xfrm>
-          <a:prstGeom prst="rect">
-            <a:avLst/>
-          </a:prstGeom>
-          <a:noFill/>
-        </p:spPr>
-        <p:txBody>
-          <a:bodyPr wrap="square" lIns="0" rIns="0" tIns="0" bIns="0" anchor="t">
-            <a:spAutoFit/>
-          </a:bodyPr>
-          <a:lstStyle/>
-          <a:p>
-            <a:pPr algn="l">
-              <a:lnSpc>
-                <a:spcPct val="100000"/>
-              </a:lnSpc>
-            </a:pPr>
-            <a:r>
-              <a:rPr sz="1700" b="0">
-                <a:solidFill>
-                  <a:srgbClr val="232222"/>
-                </a:solidFill>
-                <a:latin typeface="KingHwa_OldSong"/>
-                <a:ea typeface="京華老宋体"/>
-                <a:cs typeface="KingHwa_OldSong"/>
-              </a:rPr>
-              <a:t>装饰边界</a:t>
-            </a:r>
-          </a:p>
-        </p:txBody>
-      </p:sp>
-      <p:sp>
-        <p:nvSpPr>
-          <p:cNvPr id="32" name="TextBox 31"/>
-          <p:cNvSpPr txBox="1"/>
-          <p:nvPr/>
-        </p:nvSpPr>
-        <p:spPr>
-          <a:xfrm>
-            <a:off x="1664208" y="5660136"/>
-            <a:ext cx="9235440" cy="109728"/>
-          </a:xfrm>
-          <a:prstGeom prst="rect">
-            <a:avLst/>
-          </a:prstGeom>
-          <a:noFill/>
-        </p:spPr>
-        <p:txBody>
-          <a:bodyPr wrap="square" lIns="0" rIns="0" tIns="0" bIns="0" anchor="t">
-            <a:spAutoFit/>
-          </a:bodyPr>
-          <a:lstStyle/>
-          <a:p>
-            <a:pPr algn="l">
-              <a:lnSpc>
-                <a:spcPct val="115000"/>
-              </a:lnSpc>
-            </a:pPr>
-            <a:r>
-              <a:rPr sz="1050" b="0">
+            <a:pPr>
+              <a:lnSpc>
+                <a:spcPct val="118000"/>
+              </a:lnSpc>
+              <a:spcAft>
+                <a:spcPts val="700"/>
+              </a:spcAft>
+            </a:pPr>
+            <a:r>
+              <a:rPr sz="1100">
                 <a:solidFill>
                   <a:srgbClr val="4A4947"/>
                 </a:solidFill>
-                <a:latin typeface="Source Han Sans SC"/>
-                <a:ea typeface="京華老宋体"/>
-                <a:cs typeface="Source Han Sans SC"/>
-              </a:rPr>
-              <a:t>只允许蓝色题签、细双线内框、档案边框；不加入纹理图片、印章贴图和竖排正文。</a:t>
+                <a:latin typeface="Newsreader"/>
+                <a:ea typeface="TsangerJinKai02-W04"/>
+                <a:cs typeface="Newsreader"/>
+              </a:rPr>
+              <a:t>上海继续承担成熟车型与出口任务，稳定现金流与交付节奏。</a:t>
+            </a:r>
+          </a:p>
+          <a:p>
+            <a:pPr>
+              <a:lnSpc>
+                <a:spcPct val="118000"/>
+              </a:lnSpc>
+              <a:spcAft>
+                <a:spcPts val="700"/>
+              </a:spcAft>
+            </a:pPr>
+            <a:r>
+              <a:rPr sz="1100">
+                <a:solidFill>
+                  <a:srgbClr val="4A4947"/>
+                </a:solidFill>
+                <a:latin typeface="Newsreader"/>
+                <a:ea typeface="TsangerJinKai02-W04"/>
+                <a:cs typeface="Newsreader"/>
+              </a:rPr>
+              <a:t>得州优先给新平台、Robotaxi 版本与下一代低成本总装工艺。</a:t>
+            </a:r>
+          </a:p>
+          <a:p>
+            <a:pPr>
+              <a:lnSpc>
+                <a:spcPct val="118000"/>
+              </a:lnSpc>
+              <a:spcAft>
+                <a:spcPts val="700"/>
+              </a:spcAft>
+            </a:pPr>
+            <a:r>
+              <a:rPr sz="1100">
+                <a:solidFill>
+                  <a:srgbClr val="4A4947"/>
+                </a:solidFill>
+                <a:latin typeface="Newsreader"/>
+                <a:ea typeface="TsangerJinKai02-W04"/>
+                <a:cs typeface="Newsreader"/>
+              </a:rPr>
+              <a:t>核心不是绝对产能，而是切换效率、良率爬坡与供应链缓冲。 </a:t>
             </a:r>
           </a:p>
         </p:txBody>
@@ -6958,10 +6689,10 @@
                   <a:srgbClr val="8B8782"/>
                 </a:solidFill>
                 <a:latin typeface="JetBrains Mono"/>
-                <a:ea typeface="京華老宋体"/>
+                <a:ea typeface="JetBrains Mono"/>
                 <a:cs typeface="JetBrains Mono"/>
               </a:rPr>
-              <a:t>TEMPLATES</a:t>
+              <a:t>AUTONOMY</a:t>
             </a:r>
           </a:p>
         </p:txBody>
@@ -6999,7 +6730,7 @@
                   <a:srgbClr val="8B8782"/>
                 </a:solidFill>
                 <a:latin typeface="JetBrains Mono"/>
-                <a:ea typeface="京華老宋体"/>
+                <a:ea typeface="JetBrains Mono"/>
                 <a:cs typeface="JetBrains Mono"/>
               </a:rPr>
               <a:t>04 / 08</a:t>
@@ -7040,7 +6771,7 @@
                   <a:srgbClr val="8B8782"/>
                 </a:solidFill>
                 <a:latin typeface="JetBrains Mono"/>
-                <a:ea typeface="京華老宋体"/>
+                <a:ea typeface="JetBrains Mono"/>
                 <a:cs typeface="JetBrains Mono"/>
               </a:rPr>
               <a:t>03 · SECTION</a:t>
@@ -7080,11 +6811,11 @@
                 <a:solidFill>
                   <a:srgbClr val="232222"/>
                 </a:solidFill>
-                <a:latin typeface="KingHwa_OldSong"/>
+                <a:latin typeface="Newsreader"/>
                 <a:ea typeface="京華老宋体"/>
-                <a:cs typeface="KingHwa_OldSong"/>
-              </a:rPr>
-              <a:t>现在能生成什么</a:t>
+                <a:cs typeface="Newsreader"/>
+              </a:rPr>
+              <a:t>Robotaxi 不是一辆车，而是一套调度业务</a:t>
             </a:r>
           </a:p>
         </p:txBody>
@@ -7156,11 +6887,11 @@
                 <a:solidFill>
                   <a:srgbClr val="666361"/>
                 </a:solidFill>
-                <a:latin typeface="Source Han Sans SC"/>
-                <a:ea typeface="京華老宋体"/>
-                <a:cs typeface="Source Han Sans SC"/>
-              </a:rPr>
-              <a:t>中文 v1 的正式能力聚焦三类高频文档，简历和作品集已保留为补充样例。</a:t>
+                <a:latin typeface="Newsreader"/>
+                <a:ea typeface="TsangerJinKai02-W04"/>
+                <a:cs typeface="Newsreader"/>
+              </a:rPr>
+              <a:t>Mock 逻辑：Robotaxi 的关键变量是上路城市、可用时长、调度效率和安全冗余，不只是硬件 BOM。</a:t>
             </a:r>
           </a:p>
         </p:txBody>
@@ -7198,7 +6929,7 @@
                   <a:srgbClr val="8B8782"/>
                 </a:solidFill>
                 <a:latin typeface="JetBrains Mono"/>
-                <a:ea typeface="京華老宋体"/>
+                <a:ea typeface="JetBrains Mono"/>
                 <a:cs typeface="JetBrains Mono"/>
               </a:rPr>
               <a:t>04 / 08</a:t>
@@ -7214,8 +6945,8 @@
         </p:nvSpPr>
         <p:spPr>
           <a:xfrm>
-            <a:off x="1069848" y="2240279"/>
-            <a:ext cx="3072384" cy="1115568"/>
+            <a:off x="1097280" y="2231136"/>
+            <a:ext cx="5577840" cy="3054096"/>
           </a:xfrm>
           <a:prstGeom prst="rect">
             <a:avLst/>
@@ -7225,7 +6956,7 @@
           </a:solidFill>
           <a:ln w="8890">
             <a:solidFill>
-              <a:srgbClr val="D0C7BB"/>
+              <a:srgbClr val="4D5B6D"/>
             </a:solidFill>
           </a:ln>
           <a:effectLst/>
@@ -7252,25 +6983,92 @@
           </a:p>
         </p:txBody>
       </p:sp>
-      <p:sp>
-        <p:nvSpPr>
-          <p:cNvPr id="15" name="Rectangle 14"/>
+      <p:pic>
+        <p:nvPicPr>
+          <p:cNvPr id="15" name="Picture 14" descr="mock-tesla-robotaxi.png"/>
+          <p:cNvPicPr>
+            <a:picLocks noChangeAspect="1"/>
+          </p:cNvPicPr>
+          <p:nvPr/>
+        </p:nvPicPr>
+        <p:blipFill>
+          <a:blip r:embed="rId3"/>
+          <a:stretch>
+            <a:fillRect/>
+          </a:stretch>
+        </p:blipFill>
+        <p:spPr>
+          <a:xfrm>
+            <a:off x="1097280" y="2231136"/>
+            <a:ext cx="5577840" cy="2706624"/>
+          </a:xfrm>
+          <a:prstGeom prst="rect">
+            <a:avLst/>
+          </a:prstGeom>
+        </p:spPr>
+      </p:pic>
+      <p:sp>
+        <p:nvSpPr>
+          <p:cNvPr id="16" name="TextBox 15"/>
+          <p:cNvSpPr txBox="1"/>
+          <p:nvPr/>
+        </p:nvSpPr>
+        <p:spPr>
+          <a:xfrm>
+            <a:off x="1261872" y="4992624"/>
+            <a:ext cx="5248656" cy="146304"/>
+          </a:xfrm>
+          <a:prstGeom prst="rect">
+            <a:avLst/>
+          </a:prstGeom>
+          <a:noFill/>
+        </p:spPr>
+        <p:txBody>
+          <a:bodyPr wrap="square" lIns="0" rIns="0" tIns="0" bIns="0" anchor="t">
+            <a:spAutoFit/>
+          </a:bodyPr>
+          <a:lstStyle/>
+          <a:p>
+            <a:pPr algn="l">
+              <a:lnSpc>
+                <a:spcPct val="100000"/>
+              </a:lnSpc>
+            </a:pPr>
+            <a:r>
+              <a:rPr sz="750" b="0">
+                <a:solidFill>
+                  <a:srgbClr val="8B8782"/>
+                </a:solidFill>
+                <a:latin typeface="JetBrains Mono"/>
+                <a:ea typeface="JetBrains Mono"/>
+                <a:cs typeface="JetBrains Mono"/>
+              </a:rPr>
+              <a:t>MOCK VISUAL · 城市内 ROBOTAXI 运营舱</a:t>
+            </a:r>
+          </a:p>
+        </p:txBody>
+      </p:sp>
+      <p:sp>
+        <p:nvSpPr>
+          <p:cNvPr id="17" name="Rectangle 16"/>
           <p:cNvSpPr/>
           <p:nvPr/>
         </p:nvSpPr>
         <p:spPr>
           <a:xfrm>
-            <a:off x="1069848" y="2240279"/>
-            <a:ext cx="3072384" cy="310896"/>
+            <a:off x="6949440" y="2304288"/>
+            <a:ext cx="1901952" cy="1078992"/>
           </a:xfrm>
           <a:prstGeom prst="rect">
             <a:avLst/>
           </a:prstGeom>
           <a:solidFill>
-            <a:srgbClr val="243851"/>
+            <a:srgbClr val="F3EFEB"/>
           </a:solidFill>
-          <a:ln>
-            <a:noFill/>
+          <a:ln w="10160">
+            <a:solidFill>
+              <a:srgbClr val="4D5B6D"/>
+            </a:solidFill>
           </a:ln>
           <a:effectLst/>
         </p:spPr>
@@ -7298,14 +7096,14 @@
       </p:sp>
       <p:sp>
         <p:nvSpPr>
-          <p:cNvPr id="16" name="TextBox 15"/>
+          <p:cNvPr id="18" name="TextBox 17"/>
           <p:cNvSpPr txBox="1"/>
           <p:nvPr/>
         </p:nvSpPr>
         <p:spPr>
           <a:xfrm>
-            <a:off x="1234440" y="2331719"/>
-            <a:ext cx="2743200" cy="109728"/>
+            <a:off x="7114032" y="2450592"/>
+            <a:ext cx="1572768" cy="347472"/>
           </a:xfrm>
           <a:prstGeom prst="rect">
             <a:avLst/>
@@ -7324,29 +7122,29 @@
               </a:lnSpc>
             </a:pPr>
             <a:r>
-              <a:rPr sz="720" b="0">
-                <a:solidFill>
-                  <a:srgbClr val="D5DEE7"/>
-                </a:solidFill>
-                <a:latin typeface="JetBrains Mono"/>
+              <a:rPr sz="2400" b="0">
+                <a:solidFill>
+                  <a:srgbClr val="243851"/>
+                </a:solidFill>
+                <a:latin typeface="Newsreader"/>
                 <a:ea typeface="京華老宋体"/>
-                <a:cs typeface="JetBrains Mono"/>
-              </a:rPr>
-              <a:t>1 PAGE</a:t>
-            </a:r>
-          </a:p>
-        </p:txBody>
-      </p:sp>
-      <p:sp>
-        <p:nvSpPr>
-          <p:cNvPr id="17" name="TextBox 16"/>
+                <a:cs typeface="Newsreader"/>
+              </a:rPr>
+              <a:t>12</a:t>
+            </a:r>
+          </a:p>
+        </p:txBody>
+      </p:sp>
+      <p:sp>
+        <p:nvSpPr>
+          <p:cNvPr id="19" name="TextBox 18"/>
           <p:cNvSpPr txBox="1"/>
           <p:nvPr/>
         </p:nvSpPr>
         <p:spPr>
           <a:xfrm>
-            <a:off x="1252728" y="2679191"/>
-            <a:ext cx="2706624" cy="310896"/>
+            <a:off x="7114032" y="2834640"/>
+            <a:ext cx="1572768" cy="164592"/>
           </a:xfrm>
           <a:prstGeom prst="rect">
             <a:avLst/>
@@ -7365,29 +7163,29 @@
               </a:lnSpc>
             </a:pPr>
             <a:r>
-              <a:rPr sz="1700" b="0">
-                <a:solidFill>
-                  <a:srgbClr val="232222"/>
-                </a:solidFill>
-                <a:latin typeface="KingHwa_OldSong"/>
-                <a:ea typeface="京華老宋体"/>
-                <a:cs typeface="KingHwa_OldSong"/>
-              </a:rPr>
-              <a:t>One-Pager</a:t>
-            </a:r>
-          </a:p>
-        </p:txBody>
-      </p:sp>
-      <p:sp>
-        <p:nvSpPr>
-          <p:cNvPr id="18" name="TextBox 17"/>
+              <a:rPr sz="850" b="0">
+                <a:solidFill>
+                  <a:srgbClr val="8B8782"/>
+                </a:solidFill>
+                <a:latin typeface="Newsreader"/>
+                <a:ea typeface="TsangerJinKai02-W04"/>
+                <a:cs typeface="Newsreader"/>
+              </a:rPr>
+              <a:t>PILOT CITIES</a:t>
+            </a:r>
+          </a:p>
+        </p:txBody>
+      </p:sp>
+      <p:sp>
+        <p:nvSpPr>
+          <p:cNvPr id="20" name="TextBox 19"/>
           <p:cNvSpPr txBox="1"/>
           <p:nvPr/>
         </p:nvSpPr>
         <p:spPr>
           <a:xfrm>
-            <a:off x="1252728" y="3118103"/>
-            <a:ext cx="2706624" cy="420624"/>
+            <a:off x="7114032" y="3054096"/>
+            <a:ext cx="1572768" cy="182880"/>
           </a:xfrm>
           <a:prstGeom prst="rect">
             <a:avLst/>
@@ -7402,33 +7200,33 @@
           <a:p>
             <a:pPr algn="l">
               <a:lnSpc>
-                <a:spcPct val="115000"/>
-              </a:lnSpc>
-            </a:pPr>
-            <a:r>
-              <a:rPr sz="1050" b="0">
-                <a:solidFill>
-                  <a:srgbClr val="4A4947"/>
-                </a:solidFill>
-                <a:latin typeface="Source Han Sans SC"/>
-                <a:ea typeface="京華老宋体"/>
-                <a:cs typeface="Source Han Sans SC"/>
-              </a:rPr>
-              <a:t>公司介绍、项目方案、执行摘要。重点是 30 秒抓住核心。</a:t>
-            </a:r>
-          </a:p>
-        </p:txBody>
-      </p:sp>
-      <p:sp>
-        <p:nvSpPr>
-          <p:cNvPr id="19" name="Rectangle 18"/>
+                <a:spcPct val="100000"/>
+              </a:lnSpc>
+            </a:pPr>
+            <a:r>
+              <a:rPr sz="850" b="0">
+                <a:solidFill>
+                  <a:srgbClr val="666361"/>
+                </a:solidFill>
+                <a:latin typeface="Newsreader"/>
+                <a:ea typeface="TsangerJinKai02-W04"/>
+                <a:cs typeface="Newsreader"/>
+              </a:rPr>
+              <a:t>首波试点城市</a:t>
+            </a:r>
+          </a:p>
+        </p:txBody>
+      </p:sp>
+      <p:sp>
+        <p:nvSpPr>
+          <p:cNvPr id="21" name="Rectangle 20"/>
           <p:cNvSpPr/>
           <p:nvPr/>
         </p:nvSpPr>
         <p:spPr>
           <a:xfrm>
-            <a:off x="4544568" y="2240279"/>
-            <a:ext cx="3072384" cy="1115568"/>
+            <a:off x="9015984" y="2304288"/>
+            <a:ext cx="1901952" cy="1078992"/>
           </a:xfrm>
           <a:prstGeom prst="rect">
             <a:avLst/>
@@ -7436,9 +7234,9 @@
           <a:solidFill>
             <a:srgbClr val="F3EFEB"/>
           </a:solidFill>
-          <a:ln w="8890">
+          <a:ln w="10160">
             <a:solidFill>
-              <a:srgbClr val="D0C7BB"/>
+              <a:srgbClr val="4D5B6D"/>
             </a:solidFill>
           </a:ln>
           <a:effectLst/>
@@ -7467,58 +7265,14 @@
       </p:sp>
       <p:sp>
         <p:nvSpPr>
-          <p:cNvPr id="20" name="Rectangle 19"/>
-          <p:cNvSpPr/>
-          <p:nvPr/>
-        </p:nvSpPr>
-        <p:spPr>
-          <a:xfrm>
-            <a:off x="4544568" y="2240279"/>
-            <a:ext cx="3072384" cy="310896"/>
-          </a:xfrm>
-          <a:prstGeom prst="rect">
-            <a:avLst/>
-          </a:prstGeom>
-          <a:solidFill>
-            <a:srgbClr val="243851"/>
-          </a:solidFill>
-          <a:ln>
-            <a:noFill/>
-          </a:ln>
-          <a:effectLst/>
-        </p:spPr>
-        <p:style>
-          <a:lnRef idx="1">
-            <a:schemeClr val="accent1"/>
-          </a:lnRef>
-          <a:fillRef idx="3">
-            <a:schemeClr val="accent1"/>
-          </a:fillRef>
-          <a:effectRef idx="2">
-            <a:schemeClr val="accent1"/>
-          </a:effectRef>
-          <a:fontRef idx="minor">
-            <a:schemeClr val="lt1"/>
-          </a:fontRef>
-        </p:style>
-        <p:txBody>
-          <a:bodyPr rtlCol="0" anchor="ctr"/>
-          <a:lstStyle/>
-          <a:p>
-            <a:pPr algn="ctr"/>
-          </a:p>
-        </p:txBody>
-      </p:sp>
-      <p:sp>
-        <p:nvSpPr>
-          <p:cNvPr id="21" name="TextBox 20"/>
+          <p:cNvPr id="22" name="TextBox 21"/>
           <p:cNvSpPr txBox="1"/>
           <p:nvPr/>
         </p:nvSpPr>
         <p:spPr>
           <a:xfrm>
-            <a:off x="4709160" y="2331719"/>
-            <a:ext cx="2743200" cy="109728"/>
+            <a:off x="9180576" y="2450592"/>
+            <a:ext cx="1572768" cy="347472"/>
           </a:xfrm>
           <a:prstGeom prst="rect">
             <a:avLst/>
@@ -7537,29 +7291,29 @@
               </a:lnSpc>
             </a:pPr>
             <a:r>
-              <a:rPr sz="720" b="0">
-                <a:solidFill>
-                  <a:srgbClr val="D5DEE7"/>
-                </a:solidFill>
-                <a:latin typeface="JetBrains Mono"/>
+              <a:rPr sz="2400" b="0">
+                <a:solidFill>
+                  <a:srgbClr val="243851"/>
+                </a:solidFill>
+                <a:latin typeface="Newsreader"/>
                 <a:ea typeface="京華老宋体"/>
-                <a:cs typeface="JetBrains Mono"/>
-              </a:rPr>
-              <a:t>MULTI</a:t>
-            </a:r>
-          </a:p>
-        </p:txBody>
-      </p:sp>
-      <p:sp>
-        <p:nvSpPr>
-          <p:cNvPr id="22" name="TextBox 21"/>
+                <a:cs typeface="Newsreader"/>
+              </a:rPr>
+              <a:t>72%</a:t>
+            </a:r>
+          </a:p>
+        </p:txBody>
+      </p:sp>
+      <p:sp>
+        <p:nvSpPr>
+          <p:cNvPr id="23" name="TextBox 22"/>
           <p:cNvSpPr txBox="1"/>
           <p:nvPr/>
         </p:nvSpPr>
         <p:spPr>
           <a:xfrm>
-            <a:off x="4727448" y="2679191"/>
-            <a:ext cx="2706624" cy="310896"/>
+            <a:off x="9180576" y="2834640"/>
+            <a:ext cx="1572768" cy="164592"/>
           </a:xfrm>
           <a:prstGeom prst="rect">
             <a:avLst/>
@@ -7578,29 +7332,29 @@
               </a:lnSpc>
             </a:pPr>
             <a:r>
-              <a:rPr sz="1700" b="0">
-                <a:solidFill>
-                  <a:srgbClr val="232222"/>
-                </a:solidFill>
-                <a:latin typeface="KingHwa_OldSong"/>
-                <a:ea typeface="京華老宋体"/>
-                <a:cs typeface="KingHwa_OldSong"/>
-              </a:rPr>
-              <a:t>Long Doc</a:t>
-            </a:r>
-          </a:p>
-        </p:txBody>
-      </p:sp>
-      <p:sp>
-        <p:nvSpPr>
-          <p:cNvPr id="23" name="TextBox 22"/>
+              <a:rPr sz="850" b="0">
+                <a:solidFill>
+                  <a:srgbClr val="8B8782"/>
+                </a:solidFill>
+                <a:latin typeface="Newsreader"/>
+                <a:ea typeface="TsangerJinKai02-W04"/>
+                <a:cs typeface="Newsreader"/>
+              </a:rPr>
+              <a:t>UTILIZATION</a:t>
+            </a:r>
+          </a:p>
+        </p:txBody>
+      </p:sp>
+      <p:sp>
+        <p:nvSpPr>
+          <p:cNvPr id="24" name="TextBox 23"/>
           <p:cNvSpPr txBox="1"/>
           <p:nvPr/>
         </p:nvSpPr>
         <p:spPr>
           <a:xfrm>
-            <a:off x="4727448" y="3118103"/>
-            <a:ext cx="2706624" cy="420624"/>
+            <a:off x="9180576" y="3054096"/>
+            <a:ext cx="1572768" cy="182880"/>
           </a:xfrm>
           <a:prstGeom prst="rect">
             <a:avLst/>
@@ -7615,658 +7369,105 @@
           <a:p>
             <a:pPr algn="l">
               <a:lnSpc>
-                <a:spcPct val="115000"/>
-              </a:lnSpc>
-            </a:pPr>
-            <a:r>
-              <a:rPr sz="1050" b="0">
-                <a:solidFill>
-                  <a:srgbClr val="4A4947"/>
-                </a:solidFill>
-                <a:latin typeface="Source Han Sans SC"/>
-                <a:ea typeface="京華老宋体"/>
-                <a:cs typeface="Source Han Sans SC"/>
-              </a:rPr>
-              <a:t>白皮书、长文报告、年度总结。强调章节结构与证据链。</a:t>
-            </a:r>
-          </a:p>
-        </p:txBody>
-      </p:sp>
-      <p:sp>
-        <p:nvSpPr>
-          <p:cNvPr id="24" name="Rectangle 23"/>
-          <p:cNvSpPr/>
-          <p:nvPr/>
-        </p:nvSpPr>
-        <p:spPr>
-          <a:xfrm>
-            <a:off x="8019288" y="2240279"/>
-            <a:ext cx="3072384" cy="1115568"/>
-          </a:xfrm>
-          <a:prstGeom prst="rect">
-            <a:avLst/>
-          </a:prstGeom>
-          <a:solidFill>
-            <a:srgbClr val="F3EFEB"/>
-          </a:solidFill>
-          <a:ln w="8890">
-            <a:solidFill>
-              <a:srgbClr val="D0C7BB"/>
-            </a:solidFill>
-          </a:ln>
-          <a:effectLst/>
-        </p:spPr>
-        <p:style>
-          <a:lnRef idx="1">
-            <a:schemeClr val="accent1"/>
-          </a:lnRef>
-          <a:fillRef idx="3">
-            <a:schemeClr val="accent1"/>
-          </a:fillRef>
-          <a:effectRef idx="2">
-            <a:schemeClr val="accent1"/>
-          </a:effectRef>
-          <a:fontRef idx="minor">
-            <a:schemeClr val="lt1"/>
-          </a:fontRef>
-        </p:style>
-        <p:txBody>
-          <a:bodyPr rtlCol="0" anchor="ctr"/>
-          <a:lstStyle/>
-          <a:p>
-            <a:pPr algn="ctr"/>
-          </a:p>
-        </p:txBody>
-      </p:sp>
-      <p:sp>
-        <p:nvSpPr>
-          <p:cNvPr id="25" name="Rectangle 24"/>
-          <p:cNvSpPr/>
-          <p:nvPr/>
-        </p:nvSpPr>
-        <p:spPr>
-          <a:xfrm>
-            <a:off x="8019288" y="2240279"/>
-            <a:ext cx="3072384" cy="310896"/>
-          </a:xfrm>
-          <a:prstGeom prst="rect">
-            <a:avLst/>
-          </a:prstGeom>
-          <a:solidFill>
-            <a:srgbClr val="243851"/>
-          </a:solidFill>
-          <a:ln>
-            <a:noFill/>
-          </a:ln>
-          <a:effectLst/>
-        </p:spPr>
-        <p:style>
-          <a:lnRef idx="1">
-            <a:schemeClr val="accent1"/>
-          </a:lnRef>
-          <a:fillRef idx="3">
-            <a:schemeClr val="accent1"/>
-          </a:fillRef>
-          <a:effectRef idx="2">
-            <a:schemeClr val="accent1"/>
-          </a:effectRef>
-          <a:fontRef idx="minor">
-            <a:schemeClr val="lt1"/>
-          </a:fontRef>
-        </p:style>
-        <p:txBody>
-          <a:bodyPr rtlCol="0" anchor="ctr"/>
-          <a:lstStyle/>
-          <a:p>
-            <a:pPr algn="ctr"/>
-          </a:p>
-        </p:txBody>
-      </p:sp>
-      <p:sp>
-        <p:nvSpPr>
-          <p:cNvPr id="26" name="TextBox 25"/>
+                <a:spcPct val="100000"/>
+              </a:lnSpc>
+            </a:pPr>
+            <a:r>
+              <a:rPr sz="850" b="0">
+                <a:solidFill>
+                  <a:srgbClr val="666361"/>
+                </a:solidFill>
+                <a:latin typeface="Newsreader"/>
+                <a:ea typeface="TsangerJinKai02-W04"/>
+                <a:cs typeface="Newsreader"/>
+              </a:rPr>
+              <a:t>高峰时段车辆利用</a:t>
+            </a:r>
+          </a:p>
+        </p:txBody>
+      </p:sp>
+      <p:sp>
+        <p:nvSpPr>
+          <p:cNvPr id="25" name="TextBox 24"/>
           <p:cNvSpPr txBox="1"/>
           <p:nvPr/>
         </p:nvSpPr>
         <p:spPr>
           <a:xfrm>
-            <a:off x="8183880" y="2331719"/>
-            <a:ext cx="2743200" cy="109728"/>
-          </a:xfrm>
-          <a:prstGeom prst="rect">
-            <a:avLst/>
-          </a:prstGeom>
-          <a:noFill/>
-        </p:spPr>
-        <p:txBody>
-          <a:bodyPr wrap="square" lIns="0" rIns="0" tIns="0" bIns="0" anchor="t">
+            <a:off x="6949440" y="3785616"/>
+            <a:ext cx="3749039" cy="1481328"/>
+          </a:xfrm>
+          <a:prstGeom prst="rect">
+            <a:avLst/>
+          </a:prstGeom>
+          <a:noFill/>
+        </p:spPr>
+        <p:txBody>
+          <a:bodyPr wrap="square" lIns="0" rIns="0" tIns="0" bIns="0">
             <a:spAutoFit/>
           </a:bodyPr>
           <a:lstStyle/>
           <a:p>
-            <a:pPr algn="l">
-              <a:lnSpc>
-                <a:spcPct val="100000"/>
-              </a:lnSpc>
-            </a:pPr>
-            <a:r>
-              <a:rPr sz="720" b="0">
-                <a:solidFill>
-                  <a:srgbClr val="D5DEE7"/>
-                </a:solidFill>
-                <a:latin typeface="JetBrains Mono"/>
-                <a:ea typeface="京華老宋体"/>
-                <a:cs typeface="JetBrains Mono"/>
-              </a:rPr>
-              <a:t>1 PAGE</a:t>
-            </a:r>
-          </a:p>
-        </p:txBody>
-      </p:sp>
-      <p:sp>
-        <p:nvSpPr>
-          <p:cNvPr id="27" name="TextBox 26"/>
-          <p:cNvSpPr txBox="1"/>
-          <p:nvPr/>
-        </p:nvSpPr>
-        <p:spPr>
-          <a:xfrm>
-            <a:off x="8202168" y="2679191"/>
-            <a:ext cx="2706624" cy="310896"/>
-          </a:xfrm>
-          <a:prstGeom prst="rect">
-            <a:avLst/>
-          </a:prstGeom>
-          <a:noFill/>
-        </p:spPr>
-        <p:txBody>
-          <a:bodyPr wrap="square" lIns="0" rIns="0" tIns="0" bIns="0" anchor="t">
-            <a:spAutoFit/>
-          </a:bodyPr>
-          <a:lstStyle/>
-          <a:p>
-            <a:pPr algn="l">
-              <a:lnSpc>
-                <a:spcPct val="100000"/>
-              </a:lnSpc>
-            </a:pPr>
-            <a:r>
-              <a:rPr sz="1700" b="0">
-                <a:solidFill>
-                  <a:srgbClr val="232222"/>
-                </a:solidFill>
-                <a:latin typeface="KingHwa_OldSong"/>
-                <a:ea typeface="京華老宋体"/>
-                <a:cs typeface="KingHwa_OldSong"/>
-              </a:rPr>
-              <a:t>Letter</a:t>
-            </a:r>
-          </a:p>
-        </p:txBody>
-      </p:sp>
-      <p:sp>
-        <p:nvSpPr>
-          <p:cNvPr id="28" name="TextBox 27"/>
-          <p:cNvSpPr txBox="1"/>
-          <p:nvPr/>
-        </p:nvSpPr>
-        <p:spPr>
-          <a:xfrm>
-            <a:off x="8202168" y="3118103"/>
-            <a:ext cx="2706624" cy="420624"/>
-          </a:xfrm>
-          <a:prstGeom prst="rect">
-            <a:avLst/>
-          </a:prstGeom>
-          <a:noFill/>
-        </p:spPr>
-        <p:txBody>
-          <a:bodyPr wrap="square" lIns="0" rIns="0" tIns="0" bIns="0" anchor="t">
-            <a:spAutoFit/>
-          </a:bodyPr>
-          <a:lstStyle/>
-          <a:p>
-            <a:pPr algn="l">
-              <a:lnSpc>
-                <a:spcPct val="115000"/>
-              </a:lnSpc>
-            </a:pPr>
-            <a:r>
-              <a:rPr sz="1050" b="0">
+            <a:pPr>
+              <a:lnSpc>
+                <a:spcPct val="118000"/>
+              </a:lnSpc>
+              <a:spcAft>
+                <a:spcPts val="700"/>
+              </a:spcAft>
+            </a:pPr>
+            <a:r>
+              <a:rPr sz="1100">
                 <a:solidFill>
                   <a:srgbClr val="4A4947"/>
                 </a:solidFill>
-                <a:latin typeface="Source Han Sans SC"/>
-                <a:ea typeface="京華老宋体"/>
-                <a:cs typeface="Source Han Sans SC"/>
-              </a:rPr>
-              <a:t>正式信件、推荐信、推荐函。关系、证据、匹配、推荐。</a:t>
-            </a:r>
-          </a:p>
-        </p:txBody>
-      </p:sp>
-      <p:sp>
-        <p:nvSpPr>
-          <p:cNvPr id="29" name="Rectangle 28"/>
-          <p:cNvSpPr/>
-          <p:nvPr/>
-        </p:nvSpPr>
-        <p:spPr>
-          <a:xfrm>
-            <a:off x="1069848" y="3721607"/>
-            <a:ext cx="3072384" cy="1115568"/>
-          </a:xfrm>
-          <a:prstGeom prst="rect">
-            <a:avLst/>
-          </a:prstGeom>
-          <a:solidFill>
-            <a:srgbClr val="F3EFEB"/>
-          </a:solidFill>
-          <a:ln w="8890">
-            <a:solidFill>
-              <a:srgbClr val="D0C7BB"/>
-            </a:solidFill>
-          </a:ln>
-          <a:effectLst/>
-        </p:spPr>
-        <p:style>
-          <a:lnRef idx="1">
-            <a:schemeClr val="accent1"/>
-          </a:lnRef>
-          <a:fillRef idx="3">
-            <a:schemeClr val="accent1"/>
-          </a:fillRef>
-          <a:effectRef idx="2">
-            <a:schemeClr val="accent1"/>
-          </a:effectRef>
-          <a:fontRef idx="minor">
-            <a:schemeClr val="lt1"/>
-          </a:fontRef>
-        </p:style>
-        <p:txBody>
-          <a:bodyPr rtlCol="0" anchor="ctr"/>
-          <a:lstStyle/>
-          <a:p>
-            <a:pPr algn="ctr"/>
-          </a:p>
-        </p:txBody>
-      </p:sp>
-      <p:sp>
-        <p:nvSpPr>
-          <p:cNvPr id="30" name="Rectangle 29"/>
-          <p:cNvSpPr/>
-          <p:nvPr/>
-        </p:nvSpPr>
-        <p:spPr>
-          <a:xfrm>
-            <a:off x="1069848" y="3721607"/>
-            <a:ext cx="3072384" cy="310896"/>
-          </a:xfrm>
-          <a:prstGeom prst="rect">
-            <a:avLst/>
-          </a:prstGeom>
-          <a:solidFill>
-            <a:srgbClr val="243851"/>
-          </a:solidFill>
-          <a:ln>
-            <a:noFill/>
-          </a:ln>
-          <a:effectLst/>
-        </p:spPr>
-        <p:style>
-          <a:lnRef idx="1">
-            <a:schemeClr val="accent1"/>
-          </a:lnRef>
-          <a:fillRef idx="3">
-            <a:schemeClr val="accent1"/>
-          </a:fillRef>
-          <a:effectRef idx="2">
-            <a:schemeClr val="accent1"/>
-          </a:effectRef>
-          <a:fontRef idx="minor">
-            <a:schemeClr val="lt1"/>
-          </a:fontRef>
-        </p:style>
-        <p:txBody>
-          <a:bodyPr rtlCol="0" anchor="ctr"/>
-          <a:lstStyle/>
-          <a:p>
-            <a:pPr algn="ctr"/>
-          </a:p>
-        </p:txBody>
-      </p:sp>
-      <p:sp>
-        <p:nvSpPr>
-          <p:cNvPr id="31" name="TextBox 30"/>
-          <p:cNvSpPr txBox="1"/>
-          <p:nvPr/>
-        </p:nvSpPr>
-        <p:spPr>
-          <a:xfrm>
-            <a:off x="1234440" y="3813047"/>
-            <a:ext cx="2743200" cy="109728"/>
-          </a:xfrm>
-          <a:prstGeom prst="rect">
-            <a:avLst/>
-          </a:prstGeom>
-          <a:noFill/>
-        </p:spPr>
-        <p:txBody>
-          <a:bodyPr wrap="square" lIns="0" rIns="0" tIns="0" bIns="0" anchor="t">
-            <a:spAutoFit/>
-          </a:bodyPr>
-          <a:lstStyle/>
-          <a:p>
-            <a:pPr algn="l">
-              <a:lnSpc>
-                <a:spcPct val="100000"/>
-              </a:lnSpc>
-            </a:pPr>
-            <a:r>
-              <a:rPr sz="720" b="0">
-                <a:solidFill>
-                  <a:srgbClr val="D5DEE7"/>
-                </a:solidFill>
-                <a:latin typeface="JetBrains Mono"/>
-                <a:ea typeface="京華老宋体"/>
-                <a:cs typeface="JetBrains Mono"/>
-              </a:rPr>
-              <a:t>DEMO</a:t>
-            </a:r>
-          </a:p>
-        </p:txBody>
-      </p:sp>
-      <p:sp>
-        <p:nvSpPr>
-          <p:cNvPr id="32" name="TextBox 31"/>
-          <p:cNvSpPr txBox="1"/>
-          <p:nvPr/>
-        </p:nvSpPr>
-        <p:spPr>
-          <a:xfrm>
-            <a:off x="1252728" y="4160519"/>
-            <a:ext cx="2706624" cy="310896"/>
-          </a:xfrm>
-          <a:prstGeom prst="rect">
-            <a:avLst/>
-          </a:prstGeom>
-          <a:noFill/>
-        </p:spPr>
-        <p:txBody>
-          <a:bodyPr wrap="square" lIns="0" rIns="0" tIns="0" bIns="0" anchor="t">
-            <a:spAutoFit/>
-          </a:bodyPr>
-          <a:lstStyle/>
-          <a:p>
-            <a:pPr algn="l">
-              <a:lnSpc>
-                <a:spcPct val="100000"/>
-              </a:lnSpc>
-            </a:pPr>
-            <a:r>
-              <a:rPr sz="1700" b="0">
-                <a:solidFill>
-                  <a:srgbClr val="232222"/>
-                </a:solidFill>
-                <a:latin typeface="KingHwa_OldSong"/>
-                <a:ea typeface="京華老宋体"/>
-                <a:cs typeface="KingHwa_OldSong"/>
-              </a:rPr>
-              <a:t>Resume</a:t>
-            </a:r>
-          </a:p>
-        </p:txBody>
-      </p:sp>
-      <p:sp>
-        <p:nvSpPr>
-          <p:cNvPr id="33" name="TextBox 32"/>
-          <p:cNvSpPr txBox="1"/>
-          <p:nvPr/>
-        </p:nvSpPr>
-        <p:spPr>
-          <a:xfrm>
-            <a:off x="1252728" y="4599431"/>
-            <a:ext cx="2706624" cy="420624"/>
-          </a:xfrm>
-          <a:prstGeom prst="rect">
-            <a:avLst/>
-          </a:prstGeom>
-          <a:noFill/>
-        </p:spPr>
-        <p:txBody>
-          <a:bodyPr wrap="square" lIns="0" rIns="0" tIns="0" bIns="0" anchor="t">
-            <a:spAutoFit/>
-          </a:bodyPr>
-          <a:lstStyle/>
-          <a:p>
-            <a:pPr algn="l">
-              <a:lnSpc>
-                <a:spcPct val="115000"/>
-              </a:lnSpc>
-            </a:pPr>
-            <a:r>
-              <a:rPr sz="1050" b="0">
+                <a:latin typeface="Newsreader"/>
+                <a:ea typeface="TsangerJinKai02-W04"/>
+                <a:cs typeface="Newsreader"/>
+              </a:rPr>
+              <a:t>先把封闭区域和固定路线跑顺，再扩大到开放路网。</a:t>
+            </a:r>
+          </a:p>
+          <a:p>
+            <a:pPr>
+              <a:lnSpc>
+                <a:spcPct val="118000"/>
+              </a:lnSpc>
+              <a:spcAft>
+                <a:spcPts val="700"/>
+              </a:spcAft>
+            </a:pPr>
+            <a:r>
+              <a:rPr sz="1100">
                 <a:solidFill>
                   <a:srgbClr val="4A4947"/>
                 </a:solidFill>
-                <a:latin typeface="Source Han Sans SC"/>
-                <a:ea typeface="京華老宋体"/>
-                <a:cs typeface="Source Han Sans SC"/>
-              </a:rPr>
-              <a:t>固定坐标版简历样例，适合验证蓝框档案式布局。</a:t>
-            </a:r>
-          </a:p>
-        </p:txBody>
-      </p:sp>
-      <p:sp>
-        <p:nvSpPr>
-          <p:cNvPr id="34" name="Rectangle 33"/>
-          <p:cNvSpPr/>
-          <p:nvPr/>
-        </p:nvSpPr>
-        <p:spPr>
-          <a:xfrm>
-            <a:off x="4544568" y="3721607"/>
-            <a:ext cx="3072384" cy="1115568"/>
-          </a:xfrm>
-          <a:prstGeom prst="rect">
-            <a:avLst/>
-          </a:prstGeom>
-          <a:solidFill>
-            <a:srgbClr val="F3EFEB"/>
-          </a:solidFill>
-          <a:ln w="8890">
-            <a:solidFill>
-              <a:srgbClr val="D0C7BB"/>
-            </a:solidFill>
-          </a:ln>
-          <a:effectLst/>
-        </p:spPr>
-        <p:style>
-          <a:lnRef idx="1">
-            <a:schemeClr val="accent1"/>
-          </a:lnRef>
-          <a:fillRef idx="3">
-            <a:schemeClr val="accent1"/>
-          </a:fillRef>
-          <a:effectRef idx="2">
-            <a:schemeClr val="accent1"/>
-          </a:effectRef>
-          <a:fontRef idx="minor">
-            <a:schemeClr val="lt1"/>
-          </a:fontRef>
-        </p:style>
-        <p:txBody>
-          <a:bodyPr rtlCol="0" anchor="ctr"/>
-          <a:lstStyle/>
-          <a:p>
-            <a:pPr algn="ctr"/>
-          </a:p>
-        </p:txBody>
-      </p:sp>
-      <p:sp>
-        <p:nvSpPr>
-          <p:cNvPr id="35" name="Rectangle 34"/>
-          <p:cNvSpPr/>
-          <p:nvPr/>
-        </p:nvSpPr>
-        <p:spPr>
-          <a:xfrm>
-            <a:off x="4544568" y="3721607"/>
-            <a:ext cx="3072384" cy="310896"/>
-          </a:xfrm>
-          <a:prstGeom prst="rect">
-            <a:avLst/>
-          </a:prstGeom>
-          <a:solidFill>
-            <a:srgbClr val="243851"/>
-          </a:solidFill>
-          <a:ln>
-            <a:noFill/>
-          </a:ln>
-          <a:effectLst/>
-        </p:spPr>
-        <p:style>
-          <a:lnRef idx="1">
-            <a:schemeClr val="accent1"/>
-          </a:lnRef>
-          <a:fillRef idx="3">
-            <a:schemeClr val="accent1"/>
-          </a:fillRef>
-          <a:effectRef idx="2">
-            <a:schemeClr val="accent1"/>
-          </a:effectRef>
-          <a:fontRef idx="minor">
-            <a:schemeClr val="lt1"/>
-          </a:fontRef>
-        </p:style>
-        <p:txBody>
-          <a:bodyPr rtlCol="0" anchor="ctr"/>
-          <a:lstStyle/>
-          <a:p>
-            <a:pPr algn="ctr"/>
-          </a:p>
-        </p:txBody>
-      </p:sp>
-      <p:sp>
-        <p:nvSpPr>
-          <p:cNvPr id="36" name="TextBox 35"/>
-          <p:cNvSpPr txBox="1"/>
-          <p:nvPr/>
-        </p:nvSpPr>
-        <p:spPr>
-          <a:xfrm>
-            <a:off x="4709160" y="3813047"/>
-            <a:ext cx="2743200" cy="109728"/>
-          </a:xfrm>
-          <a:prstGeom prst="rect">
-            <a:avLst/>
-          </a:prstGeom>
-          <a:noFill/>
-        </p:spPr>
-        <p:txBody>
-          <a:bodyPr wrap="square" lIns="0" rIns="0" tIns="0" bIns="0" anchor="t">
-            <a:spAutoFit/>
-          </a:bodyPr>
-          <a:lstStyle/>
-          <a:p>
-            <a:pPr algn="l">
-              <a:lnSpc>
-                <a:spcPct val="100000"/>
-              </a:lnSpc>
-            </a:pPr>
-            <a:r>
-              <a:rPr sz="720" b="0">
-                <a:solidFill>
-                  <a:srgbClr val="D5DEE7"/>
-                </a:solidFill>
-                <a:latin typeface="JetBrains Mono"/>
-                <a:ea typeface="京華老宋体"/>
-                <a:cs typeface="JetBrains Mono"/>
-              </a:rPr>
-              <a:t>DEMO</a:t>
-            </a:r>
-          </a:p>
-        </p:txBody>
-      </p:sp>
-      <p:sp>
-        <p:nvSpPr>
-          <p:cNvPr id="37" name="TextBox 36"/>
-          <p:cNvSpPr txBox="1"/>
-          <p:nvPr/>
-        </p:nvSpPr>
-        <p:spPr>
-          <a:xfrm>
-            <a:off x="4727448" y="4160519"/>
-            <a:ext cx="2706624" cy="310896"/>
-          </a:xfrm>
-          <a:prstGeom prst="rect">
-            <a:avLst/>
-          </a:prstGeom>
-          <a:noFill/>
-        </p:spPr>
-        <p:txBody>
-          <a:bodyPr wrap="square" lIns="0" rIns="0" tIns="0" bIns="0" anchor="t">
-            <a:spAutoFit/>
-          </a:bodyPr>
-          <a:lstStyle/>
-          <a:p>
-            <a:pPr algn="l">
-              <a:lnSpc>
-                <a:spcPct val="100000"/>
-              </a:lnSpc>
-            </a:pPr>
-            <a:r>
-              <a:rPr sz="1700" b="0">
-                <a:solidFill>
-                  <a:srgbClr val="232222"/>
-                </a:solidFill>
-                <a:latin typeface="KingHwa_OldSong"/>
-                <a:ea typeface="京華老宋体"/>
-                <a:cs typeface="KingHwa_OldSong"/>
-              </a:rPr>
-              <a:t>Portfolio</a:t>
-            </a:r>
-          </a:p>
-        </p:txBody>
-      </p:sp>
-      <p:sp>
-        <p:nvSpPr>
-          <p:cNvPr id="38" name="TextBox 37"/>
-          <p:cNvSpPr txBox="1"/>
-          <p:nvPr/>
-        </p:nvSpPr>
-        <p:spPr>
-          <a:xfrm>
-            <a:off x="4727448" y="4599431"/>
-            <a:ext cx="2706624" cy="420624"/>
-          </a:xfrm>
-          <a:prstGeom prst="rect">
-            <a:avLst/>
-          </a:prstGeom>
-          <a:noFill/>
-        </p:spPr>
-        <p:txBody>
-          <a:bodyPr wrap="square" lIns="0" rIns="0" tIns="0" bIns="0" anchor="t">
-            <a:spAutoFit/>
-          </a:bodyPr>
-          <a:lstStyle/>
-          <a:p>
-            <a:pPr algn="l">
-              <a:lnSpc>
-                <a:spcPct val="115000"/>
-              </a:lnSpc>
-            </a:pPr>
-            <a:r>
-              <a:rPr sz="1050" b="0">
+                <a:latin typeface="Newsreader"/>
+                <a:ea typeface="TsangerJinKai02-W04"/>
+                <a:cs typeface="Newsreader"/>
+              </a:rPr>
+              <a:t>运营系统要同时解决调度、充电、清洁和安全事件闭环。</a:t>
+            </a:r>
+          </a:p>
+          <a:p>
+            <a:pPr>
+              <a:lnSpc>
+                <a:spcPct val="118000"/>
+              </a:lnSpc>
+              <a:spcAft>
+                <a:spcPts val="700"/>
+              </a:spcAft>
+            </a:pPr>
+            <a:r>
+              <a:rPr sz="1100">
                 <a:solidFill>
                   <a:srgbClr val="4A4947"/>
                 </a:solidFill>
-                <a:latin typeface="Source Han Sans SC"/>
-                <a:ea typeface="京華老宋体"/>
-                <a:cs typeface="Source Han Sans SC"/>
-              </a:rPr>
-              <a:t>作品集样例，保留更多视觉叙事与项目卡片。</a:t>
+                <a:latin typeface="Newsreader"/>
+                <a:ea typeface="TsangerJinKai02-W04"/>
+                <a:cs typeface="Newsreader"/>
+              </a:rPr>
+              <a:t>软件收入开始与里程、活跃车次和城市密度直接相关。</a:t>
             </a:r>
           </a:p>
         </p:txBody>
@@ -8522,10 +7723,10 @@
                   <a:srgbClr val="8B8782"/>
                 </a:solidFill>
                 <a:latin typeface="JetBrains Mono"/>
-                <a:ea typeface="京華老宋体"/>
+                <a:ea typeface="JetBrains Mono"/>
                 <a:cs typeface="JetBrains Mono"/>
               </a:rPr>
-              <a:t>NATURAL PROMPTS</a:t>
+              <a:t>ENERGY</a:t>
             </a:r>
           </a:p>
         </p:txBody>
@@ -8563,7 +7764,7 @@
                   <a:srgbClr val="8B8782"/>
                 </a:solidFill>
                 <a:latin typeface="JetBrains Mono"/>
-                <a:ea typeface="京華老宋体"/>
+                <a:ea typeface="JetBrains Mono"/>
                 <a:cs typeface="JetBrains Mono"/>
               </a:rPr>
               <a:t>05 / 08</a:t>
@@ -8604,7 +7805,7 @@
                   <a:srgbClr val="8B8782"/>
                 </a:solidFill>
                 <a:latin typeface="JetBrains Mono"/>
-                <a:ea typeface="京華老宋体"/>
+                <a:ea typeface="JetBrains Mono"/>
                 <a:cs typeface="JetBrains Mono"/>
               </a:rPr>
               <a:t>04 · SECTION</a:t>
@@ -8644,11 +7845,11 @@
                 <a:solidFill>
                   <a:srgbClr val="232222"/>
                 </a:solidFill>
-                <a:latin typeface="KingHwa_OldSong"/>
+                <a:latin typeface="Newsreader"/>
                 <a:ea typeface="京華老宋体"/>
-                <a:cs typeface="KingHwa_OldSong"/>
-              </a:rPr>
-              <a:t>不用 slash command</a:t>
+                <a:cs typeface="Newsreader"/>
+              </a:rPr>
+              <a:t>储能业务负责把增长波动磨平</a:t>
             </a:r>
           </a:p>
         </p:txBody>
@@ -8720,11 +7921,11 @@
                 <a:solidFill>
                   <a:srgbClr val="666361"/>
                 </a:solidFill>
-                <a:latin typeface="Source Han Sans SC"/>
-                <a:ea typeface="京華老宋体"/>
-                <a:cs typeface="Source Han Sans SC"/>
-              </a:rPr>
-              <a:t>用户只要说任务，skill 根据意图选择模板。输出是文档，不是聊天里的格式建议。</a:t>
+                <a:latin typeface="Newsreader"/>
+                <a:ea typeface="TsangerJinKai02-W04"/>
+                <a:cs typeface="Newsreader"/>
+              </a:rPr>
+              <a:t>Mock 逻辑：储能给 Tesla 带来的不是更性感的叙事，而是更可预测的交付节奏与更厚的项目储备。</a:t>
             </a:r>
           </a:p>
         </p:txBody>
@@ -8762,7 +7963,7 @@
                   <a:srgbClr val="8B8782"/>
                 </a:solidFill>
                 <a:latin typeface="JetBrains Mono"/>
-                <a:ea typeface="京華老宋体"/>
+                <a:ea typeface="JetBrains Mono"/>
                 <a:cs typeface="JetBrains Mono"/>
               </a:rPr>
               <a:t>05 / 08</a:t>
@@ -8778,8 +7979,8 @@
         </p:nvSpPr>
         <p:spPr>
           <a:xfrm>
-            <a:off x="1298448" y="2212848"/>
-            <a:ext cx="7955279" cy="438912"/>
+            <a:off x="1097280" y="2231136"/>
+            <a:ext cx="5577840" cy="3054096"/>
           </a:xfrm>
           <a:prstGeom prst="rect">
             <a:avLst/>
@@ -8787,9 +7988,9 @@
           <a:solidFill>
             <a:srgbClr val="F3EFEB"/>
           </a:solidFill>
-          <a:ln w="5715">
+          <a:ln w="8890">
             <a:solidFill>
-              <a:srgbClr val="D0C7BB"/>
+              <a:srgbClr val="4D5B6D"/>
             </a:solidFill>
           </a:ln>
           <a:effectLst/>
@@ -8816,16 +8017,40 @@
           </a:p>
         </p:txBody>
       </p:sp>
-      <p:sp>
-        <p:nvSpPr>
-          <p:cNvPr id="15" name="TextBox 14"/>
+      <p:pic>
+        <p:nvPicPr>
+          <p:cNvPr id="15" name="Picture 14" descr="mock-tesla-energy.png"/>
+          <p:cNvPicPr>
+            <a:picLocks noChangeAspect="1"/>
+          </p:cNvPicPr>
+          <p:nvPr/>
+        </p:nvPicPr>
+        <p:blipFill>
+          <a:blip r:embed="rId3"/>
+          <a:stretch>
+            <a:fillRect/>
+          </a:stretch>
+        </p:blipFill>
+        <p:spPr>
+          <a:xfrm>
+            <a:off x="1097280" y="2231136"/>
+            <a:ext cx="5577840" cy="2706624"/>
+          </a:xfrm>
+          <a:prstGeom prst="rect">
+            <a:avLst/>
+          </a:prstGeom>
+        </p:spPr>
+      </p:pic>
+      <p:sp>
+        <p:nvSpPr>
+          <p:cNvPr id="16" name="TextBox 15"/>
           <p:cNvSpPr txBox="1"/>
           <p:nvPr/>
         </p:nvSpPr>
         <p:spPr>
           <a:xfrm>
-            <a:off x="1527048" y="2340864"/>
-            <a:ext cx="6035040" cy="164592"/>
+            <a:off x="1261872" y="4992624"/>
+            <a:ext cx="5248656" cy="146304"/>
           </a:xfrm>
           <a:prstGeom prst="rect">
             <a:avLst/>
@@ -8844,56 +8069,15 @@
               </a:lnSpc>
             </a:pPr>
             <a:r>
-              <a:rPr sz="1400" b="0">
-                <a:solidFill>
-                  <a:srgbClr val="232222"/>
-                </a:solidFill>
-                <a:latin typeface="KingHwa_OldSong"/>
-                <a:ea typeface="京華老宋体"/>
-                <a:cs typeface="KingHwa_OldSong"/>
-              </a:rPr>
-              <a:t>“帮我生成一份白皮书”</a:t>
-            </a:r>
-          </a:p>
-        </p:txBody>
-      </p:sp>
-      <p:sp>
-        <p:nvSpPr>
-          <p:cNvPr id="16" name="TextBox 15"/>
-          <p:cNvSpPr txBox="1"/>
-          <p:nvPr/>
-        </p:nvSpPr>
-        <p:spPr>
-          <a:xfrm>
-            <a:off x="8019288" y="2350008"/>
-            <a:ext cx="914400" cy="146304"/>
-          </a:xfrm>
-          <a:prstGeom prst="rect">
-            <a:avLst/>
-          </a:prstGeom>
-          <a:noFill/>
-        </p:spPr>
-        <p:txBody>
-          <a:bodyPr wrap="square" lIns="0" rIns="0" tIns="0" bIns="0" anchor="t">
-            <a:spAutoFit/>
-          </a:bodyPr>
-          <a:lstStyle/>
-          <a:p>
-            <a:pPr algn="r">
-              <a:lnSpc>
-                <a:spcPct val="100000"/>
-              </a:lnSpc>
-            </a:pPr>
-            <a:r>
-              <a:rPr sz="800" b="0">
-                <a:solidFill>
-                  <a:srgbClr val="243851"/>
+              <a:rPr sz="750" b="0">
+                <a:solidFill>
+                  <a:srgbClr val="8B8782"/>
                 </a:solidFill>
                 <a:latin typeface="JetBrains Mono"/>
-                <a:ea typeface="京華老宋体"/>
+                <a:ea typeface="JetBrains Mono"/>
                 <a:cs typeface="JetBrains Mono"/>
               </a:rPr>
-              <a:t>LONG-DOC</a:t>
+              <a:t>MOCK VISUAL · MEGAPACK 项目交付版图</a:t>
             </a:r>
           </a:p>
         </p:txBody>
@@ -8906,8 +8090,8 @@
         </p:nvSpPr>
         <p:spPr>
           <a:xfrm>
-            <a:off x="1298448" y="2871216"/>
-            <a:ext cx="7955279" cy="438912"/>
+            <a:off x="6949440" y="2304288"/>
+            <a:ext cx="1901952" cy="1078992"/>
           </a:xfrm>
           <a:prstGeom prst="rect">
             <a:avLst/>
@@ -8915,9 +8099,9 @@
           <a:solidFill>
             <a:srgbClr val="F3EFEB"/>
           </a:solidFill>
-          <a:ln w="5715">
+          <a:ln w="10160">
             <a:solidFill>
-              <a:srgbClr val="D0C7BB"/>
+              <a:srgbClr val="4D5B6D"/>
             </a:solidFill>
           </a:ln>
           <a:effectLst/>
@@ -8952,8 +8136,8 @@
         </p:nvSpPr>
         <p:spPr>
           <a:xfrm>
-            <a:off x="1527048" y="2999232"/>
-            <a:ext cx="6035040" cy="164592"/>
+            <a:off x="7114032" y="2450592"/>
+            <a:ext cx="1572768" cy="347472"/>
           </a:xfrm>
           <a:prstGeom prst="rect">
             <a:avLst/>
@@ -8972,15 +8156,15 @@
               </a:lnSpc>
             </a:pPr>
             <a:r>
-              <a:rPr sz="1400" b="0">
-                <a:solidFill>
-                  <a:srgbClr val="232222"/>
-                </a:solidFill>
-                <a:latin typeface="KingHwa_OldSong"/>
+              <a:rPr sz="2400" b="0">
+                <a:solidFill>
+                  <a:srgbClr val="243851"/>
+                </a:solidFill>
+                <a:latin typeface="Newsreader"/>
                 <a:ea typeface="京華老宋体"/>
-                <a:cs typeface="KingHwa_OldSong"/>
-              </a:rPr>
-              <a:t>“生成一份项目方案”</a:t>
+                <a:cs typeface="Newsreader"/>
+              </a:rPr>
+              <a:t>438GWh</a:t>
             </a:r>
           </a:p>
         </p:txBody>
@@ -8993,8 +8177,8 @@
         </p:nvSpPr>
         <p:spPr>
           <a:xfrm>
-            <a:off x="8019288" y="3008376"/>
-            <a:ext cx="914400" cy="146304"/>
+            <a:off x="7114032" y="2834640"/>
+            <a:ext cx="1572768" cy="164592"/>
           </a:xfrm>
           <a:prstGeom prst="rect">
             <a:avLst/>
@@ -9007,35 +8191,76 @@
           </a:bodyPr>
           <a:lstStyle/>
           <a:p>
-            <a:pPr algn="r">
+            <a:pPr algn="l">
               <a:lnSpc>
                 <a:spcPct val="100000"/>
               </a:lnSpc>
             </a:pPr>
             <a:r>
-              <a:rPr sz="800" b="0">
-                <a:solidFill>
-                  <a:srgbClr val="243851"/>
-                </a:solidFill>
-                <a:latin typeface="JetBrains Mono"/>
-                <a:ea typeface="京華老宋体"/>
-                <a:cs typeface="JetBrains Mono"/>
-              </a:rPr>
-              <a:t>ONE-PAGER</a:t>
-            </a:r>
-          </a:p>
-        </p:txBody>
-      </p:sp>
-      <p:sp>
-        <p:nvSpPr>
-          <p:cNvPr id="20" name="Rectangle 19"/>
+              <a:rPr sz="850" b="0">
+                <a:solidFill>
+                  <a:srgbClr val="8B8782"/>
+                </a:solidFill>
+                <a:latin typeface="Newsreader"/>
+                <a:ea typeface="TsangerJinKai02-W04"/>
+                <a:cs typeface="Newsreader"/>
+              </a:rPr>
+              <a:t>BOOKED PIPELINE</a:t>
+            </a:r>
+          </a:p>
+        </p:txBody>
+      </p:sp>
+      <p:sp>
+        <p:nvSpPr>
+          <p:cNvPr id="20" name="TextBox 19"/>
+          <p:cNvSpPr txBox="1"/>
+          <p:nvPr/>
+        </p:nvSpPr>
+        <p:spPr>
+          <a:xfrm>
+            <a:off x="7114032" y="3054096"/>
+            <a:ext cx="1572768" cy="182880"/>
+          </a:xfrm>
+          <a:prstGeom prst="rect">
+            <a:avLst/>
+          </a:prstGeom>
+          <a:noFill/>
+        </p:spPr>
+        <p:txBody>
+          <a:bodyPr wrap="square" lIns="0" rIns="0" tIns="0" bIns="0" anchor="t">
+            <a:spAutoFit/>
+          </a:bodyPr>
+          <a:lstStyle/>
+          <a:p>
+            <a:pPr algn="l">
+              <a:lnSpc>
+                <a:spcPct val="100000"/>
+              </a:lnSpc>
+            </a:pPr>
+            <a:r>
+              <a:rPr sz="850" b="0">
+                <a:solidFill>
+                  <a:srgbClr val="666361"/>
+                </a:solidFill>
+                <a:latin typeface="Newsreader"/>
+                <a:ea typeface="TsangerJinKai02-W04"/>
+                <a:cs typeface="Newsreader"/>
+              </a:rPr>
+              <a:t>在手项目储备</a:t>
+            </a:r>
+          </a:p>
+        </p:txBody>
+      </p:sp>
+      <p:sp>
+        <p:nvSpPr>
+          <p:cNvPr id="21" name="Rectangle 20"/>
           <p:cNvSpPr/>
           <p:nvPr/>
         </p:nvSpPr>
         <p:spPr>
           <a:xfrm>
-            <a:off x="1298448" y="3529584"/>
-            <a:ext cx="7955279" cy="438912"/>
+            <a:off x="9015984" y="2304288"/>
+            <a:ext cx="1901952" cy="1078992"/>
           </a:xfrm>
           <a:prstGeom prst="rect">
             <a:avLst/>
@@ -9043,9 +8268,9 @@
           <a:solidFill>
             <a:srgbClr val="F3EFEB"/>
           </a:solidFill>
-          <a:ln w="5715">
+          <a:ln w="10160">
             <a:solidFill>
-              <a:srgbClr val="D0C7BB"/>
+              <a:srgbClr val="4D5B6D"/>
             </a:solidFill>
           </a:ln>
           <a:effectLst/>
@@ -9074,14 +8299,14 @@
       </p:sp>
       <p:sp>
         <p:nvSpPr>
-          <p:cNvPr id="21" name="TextBox 20"/>
+          <p:cNvPr id="22" name="TextBox 21"/>
           <p:cNvSpPr txBox="1"/>
           <p:nvPr/>
         </p:nvSpPr>
         <p:spPr>
           <a:xfrm>
-            <a:off x="1527048" y="3657600"/>
-            <a:ext cx="6035040" cy="164592"/>
+            <a:off x="9180576" y="2450592"/>
+            <a:ext cx="1572768" cy="347472"/>
           </a:xfrm>
           <a:prstGeom prst="rect">
             <a:avLst/>
@@ -9100,29 +8325,29 @@
               </a:lnSpc>
             </a:pPr>
             <a:r>
-              <a:rPr sz="1400" b="0">
-                <a:solidFill>
-                  <a:srgbClr val="232222"/>
-                </a:solidFill>
-                <a:latin typeface="KingHwa_OldSong"/>
+              <a:rPr sz="2400" b="0">
+                <a:solidFill>
+                  <a:srgbClr val="243851"/>
+                </a:solidFill>
+                <a:latin typeface="Newsreader"/>
                 <a:ea typeface="京華老宋体"/>
-                <a:cs typeface="KingHwa_OldSong"/>
-              </a:rPr>
-              <a:t>“帮我写一份推荐信”</a:t>
-            </a:r>
-          </a:p>
-        </p:txBody>
-      </p:sp>
-      <p:sp>
-        <p:nvSpPr>
-          <p:cNvPr id="22" name="TextBox 21"/>
+                <a:cs typeface="Newsreader"/>
+              </a:rPr>
+              <a:t>31%</a:t>
+            </a:r>
+          </a:p>
+        </p:txBody>
+      </p:sp>
+      <p:sp>
+        <p:nvSpPr>
+          <p:cNvPr id="23" name="TextBox 22"/>
           <p:cNvSpPr txBox="1"/>
           <p:nvPr/>
         </p:nvSpPr>
         <p:spPr>
           <a:xfrm>
-            <a:off x="8019288" y="3666744"/>
-            <a:ext cx="914400" cy="146304"/>
+            <a:off x="9180576" y="2834640"/>
+            <a:ext cx="1572768" cy="164592"/>
           </a:xfrm>
           <a:prstGeom prst="rect">
             <a:avLst/>
@@ -9135,68 +8360,22 @@
           </a:bodyPr>
           <a:lstStyle/>
           <a:p>
-            <a:pPr algn="r">
+            <a:pPr algn="l">
               <a:lnSpc>
                 <a:spcPct val="100000"/>
               </a:lnSpc>
             </a:pPr>
             <a:r>
-              <a:rPr sz="800" b="0">
-                <a:solidFill>
-                  <a:srgbClr val="243851"/>
-                </a:solidFill>
-                <a:latin typeface="JetBrains Mono"/>
-                <a:ea typeface="京華老宋体"/>
-                <a:cs typeface="JetBrains Mono"/>
-              </a:rPr>
-              <a:t>LETTER</a:t>
-            </a:r>
-          </a:p>
-        </p:txBody>
-      </p:sp>
-      <p:sp>
-        <p:nvSpPr>
-          <p:cNvPr id="23" name="Rectangle 22"/>
-          <p:cNvSpPr/>
-          <p:nvPr/>
-        </p:nvSpPr>
-        <p:spPr>
-          <a:xfrm>
-            <a:off x="1298448" y="4187952"/>
-            <a:ext cx="7955279" cy="438912"/>
-          </a:xfrm>
-          <a:prstGeom prst="rect">
-            <a:avLst/>
-          </a:prstGeom>
-          <a:solidFill>
-            <a:srgbClr val="F3EFEB"/>
-          </a:solidFill>
-          <a:ln w="5715">
-            <a:solidFill>
-              <a:srgbClr val="D0C7BB"/>
-            </a:solidFill>
-          </a:ln>
-          <a:effectLst/>
-        </p:spPr>
-        <p:style>
-          <a:lnRef idx="1">
-            <a:schemeClr val="accent1"/>
-          </a:lnRef>
-          <a:fillRef idx="3">
-            <a:schemeClr val="accent1"/>
-          </a:fillRef>
-          <a:effectRef idx="2">
-            <a:schemeClr val="accent1"/>
-          </a:effectRef>
-          <a:fontRef idx="minor">
-            <a:schemeClr val="lt1"/>
-          </a:fontRef>
-        </p:style>
-        <p:txBody>
-          <a:bodyPr rtlCol="0" anchor="ctr"/>
-          <a:lstStyle/>
-          <a:p>
-            <a:pPr algn="ctr"/>
+              <a:rPr sz="850" b="0">
+                <a:solidFill>
+                  <a:srgbClr val="8B8782"/>
+                </a:solidFill>
+                <a:latin typeface="Newsreader"/>
+                <a:ea typeface="TsangerJinKai02-W04"/>
+                <a:cs typeface="Newsreader"/>
+              </a:rPr>
+              <a:t>GROSS MARGIN</a:t>
+            </a:r>
           </a:p>
         </p:txBody>
       </p:sp>
@@ -9208,8 +8387,8 @@
         </p:nvSpPr>
         <p:spPr>
           <a:xfrm>
-            <a:off x="1527048" y="4315968"/>
-            <a:ext cx="6035040" cy="164592"/>
+            <a:off x="9180576" y="3054096"/>
+            <a:ext cx="1572768" cy="182880"/>
           </a:xfrm>
           <a:prstGeom prst="rect">
             <a:avLst/>
@@ -9228,15 +8407,15 @@
               </a:lnSpc>
             </a:pPr>
             <a:r>
-              <a:rPr sz="1400" b="0">
-                <a:solidFill>
-                  <a:srgbClr val="232222"/>
-                </a:solidFill>
-                <a:latin typeface="KingHwa_OldSong"/>
-                <a:ea typeface="京華老宋体"/>
-                <a:cs typeface="KingHwa_OldSong"/>
-              </a:rPr>
-              <a:t>“帮我把这些内容排版成好看的 PDF”</a:t>
+              <a:rPr sz="850" b="0">
+                <a:solidFill>
+                  <a:srgbClr val="666361"/>
+                </a:solidFill>
+                <a:latin typeface="Newsreader"/>
+                <a:ea typeface="TsangerJinKai02-W04"/>
+                <a:cs typeface="Newsreader"/>
+              </a:rPr>
+              <a:t>项目组合口径</a:t>
             </a:r>
           </a:p>
         </p:txBody>
@@ -9249,249 +8428,80 @@
         </p:nvSpPr>
         <p:spPr>
           <a:xfrm>
-            <a:off x="8019288" y="4325112"/>
-            <a:ext cx="914400" cy="146304"/>
-          </a:xfrm>
-          <a:prstGeom prst="rect">
-            <a:avLst/>
-          </a:prstGeom>
-          <a:noFill/>
-        </p:spPr>
-        <p:txBody>
-          <a:bodyPr wrap="square" lIns="0" rIns="0" tIns="0" bIns="0" anchor="t">
+            <a:off x="6949440" y="3785616"/>
+            <a:ext cx="3749039" cy="1481328"/>
+          </a:xfrm>
+          <a:prstGeom prst="rect">
+            <a:avLst/>
+          </a:prstGeom>
+          <a:noFill/>
+        </p:spPr>
+        <p:txBody>
+          <a:bodyPr wrap="square" lIns="0" rIns="0" tIns="0" bIns="0">
             <a:spAutoFit/>
           </a:bodyPr>
           <a:lstStyle/>
           <a:p>
-            <a:pPr algn="r">
-              <a:lnSpc>
-                <a:spcPct val="100000"/>
-              </a:lnSpc>
-            </a:pPr>
-            <a:r>
-              <a:rPr sz="800" b="0">
-                <a:solidFill>
-                  <a:srgbClr val="243851"/>
-                </a:solidFill>
-                <a:latin typeface="JetBrains Mono"/>
-                <a:ea typeface="京華老宋体"/>
-                <a:cs typeface="JetBrains Mono"/>
-              </a:rPr>
-              <a:t>INFER</a:t>
-            </a:r>
-          </a:p>
-        </p:txBody>
-      </p:sp>
-      <p:sp>
-        <p:nvSpPr>
-          <p:cNvPr id="26" name="Rectangle 25"/>
-          <p:cNvSpPr/>
-          <p:nvPr/>
-        </p:nvSpPr>
-        <p:spPr>
-          <a:xfrm>
-            <a:off x="1298448" y="4846320"/>
-            <a:ext cx="7955279" cy="438912"/>
-          </a:xfrm>
-          <a:prstGeom prst="rect">
-            <a:avLst/>
-          </a:prstGeom>
-          <a:solidFill>
-            <a:srgbClr val="F3EFEB"/>
-          </a:solidFill>
-          <a:ln w="5715">
-            <a:solidFill>
-              <a:srgbClr val="D0C7BB"/>
-            </a:solidFill>
-          </a:ln>
-          <a:effectLst/>
-        </p:spPr>
-        <p:style>
-          <a:lnRef idx="1">
-            <a:schemeClr val="accent1"/>
-          </a:lnRef>
-          <a:fillRef idx="3">
-            <a:schemeClr val="accent1"/>
-          </a:fillRef>
-          <a:effectRef idx="2">
-            <a:schemeClr val="accent1"/>
-          </a:effectRef>
-          <a:fontRef idx="minor">
-            <a:schemeClr val="lt1"/>
-          </a:fontRef>
-        </p:style>
-        <p:txBody>
-          <a:bodyPr rtlCol="0" anchor="ctr"/>
-          <a:lstStyle/>
-          <a:p>
-            <a:pPr algn="ctr"/>
-          </a:p>
-        </p:txBody>
-      </p:sp>
-      <p:sp>
-        <p:nvSpPr>
-          <p:cNvPr id="27" name="TextBox 26"/>
-          <p:cNvSpPr txBox="1"/>
-          <p:nvPr/>
-        </p:nvSpPr>
-        <p:spPr>
-          <a:xfrm>
-            <a:off x="1527048" y="4974336"/>
-            <a:ext cx="6035040" cy="164592"/>
-          </a:xfrm>
-          <a:prstGeom prst="rect">
-            <a:avLst/>
-          </a:prstGeom>
-          <a:noFill/>
-        </p:spPr>
-        <p:txBody>
-          <a:bodyPr wrap="square" lIns="0" rIns="0" tIns="0" bIns="0" anchor="t">
-            <a:spAutoFit/>
-          </a:bodyPr>
-          <a:lstStyle/>
-          <a:p>
-            <a:pPr algn="l">
-              <a:lnSpc>
-                <a:spcPct val="100000"/>
-              </a:lnSpc>
-            </a:pPr>
-            <a:r>
-              <a:rPr sz="1400" b="0">
-                <a:solidFill>
-                  <a:srgbClr val="232222"/>
-                </a:solidFill>
-                <a:latin typeface="KingHwa_OldSong"/>
-                <a:ea typeface="京華老宋体"/>
-                <a:cs typeface="KingHwa_OldSong"/>
-              </a:rPr>
-              <a:t>“做一套汇报 slides”</a:t>
-            </a:r>
-          </a:p>
-        </p:txBody>
-      </p:sp>
-      <p:sp>
-        <p:nvSpPr>
-          <p:cNvPr id="28" name="TextBox 27"/>
-          <p:cNvSpPr txBox="1"/>
-          <p:nvPr/>
-        </p:nvSpPr>
-        <p:spPr>
-          <a:xfrm>
-            <a:off x="8019288" y="4983480"/>
-            <a:ext cx="914400" cy="146304"/>
-          </a:xfrm>
-          <a:prstGeom prst="rect">
-            <a:avLst/>
-          </a:prstGeom>
-          <a:noFill/>
-        </p:spPr>
-        <p:txBody>
-          <a:bodyPr wrap="square" lIns="0" rIns="0" tIns="0" bIns="0" anchor="t">
-            <a:spAutoFit/>
-          </a:bodyPr>
-          <a:lstStyle/>
-          <a:p>
-            <a:pPr algn="r">
-              <a:lnSpc>
-                <a:spcPct val="100000"/>
-              </a:lnSpc>
-            </a:pPr>
-            <a:r>
-              <a:rPr sz="800" b="0">
-                <a:solidFill>
-                  <a:srgbClr val="243851"/>
-                </a:solidFill>
-                <a:latin typeface="JetBrains Mono"/>
-                <a:ea typeface="京華老宋体"/>
-                <a:cs typeface="JetBrains Mono"/>
-              </a:rPr>
-              <a:t>SLIDES</a:t>
-            </a:r>
-          </a:p>
-        </p:txBody>
-      </p:sp>
-      <p:sp>
-        <p:nvSpPr>
-          <p:cNvPr id="29" name="Rectangle 28"/>
-          <p:cNvSpPr/>
-          <p:nvPr/>
-        </p:nvSpPr>
-        <p:spPr>
-          <a:xfrm>
-            <a:off x="9637776" y="2212848"/>
-            <a:ext cx="1280160" cy="3090672"/>
-          </a:xfrm>
-          <a:prstGeom prst="rect">
-            <a:avLst/>
-          </a:prstGeom>
-          <a:solidFill>
-            <a:srgbClr val="243851"/>
-          </a:solidFill>
-          <a:ln>
-            <a:noFill/>
-          </a:ln>
-          <a:effectLst/>
-        </p:spPr>
-        <p:style>
-          <a:lnRef idx="1">
-            <a:schemeClr val="accent1"/>
-          </a:lnRef>
-          <a:fillRef idx="3">
-            <a:schemeClr val="accent1"/>
-          </a:fillRef>
-          <a:effectRef idx="2">
-            <a:schemeClr val="accent1"/>
-          </a:effectRef>
-          <a:fontRef idx="minor">
-            <a:schemeClr val="lt1"/>
-          </a:fontRef>
-        </p:style>
-        <p:txBody>
-          <a:bodyPr rtlCol="0" anchor="ctr"/>
-          <a:lstStyle/>
-          <a:p>
-            <a:pPr algn="ctr"/>
-          </a:p>
-        </p:txBody>
-      </p:sp>
-      <p:sp>
-        <p:nvSpPr>
-          <p:cNvPr id="30" name="TextBox 29"/>
-          <p:cNvSpPr txBox="1"/>
-          <p:nvPr/>
-        </p:nvSpPr>
-        <p:spPr>
-          <a:xfrm>
-            <a:off x="9774936" y="3108960"/>
-            <a:ext cx="1005840" cy="731520"/>
-          </a:xfrm>
-          <a:prstGeom prst="rect">
-            <a:avLst/>
-          </a:prstGeom>
-          <a:noFill/>
-        </p:spPr>
-        <p:txBody>
-          <a:bodyPr wrap="square" lIns="0" rIns="0" tIns="0" bIns="0" anchor="ctr">
-            <a:spAutoFit/>
-          </a:bodyPr>
-          <a:lstStyle/>
-          <a:p>
-            <a:pPr algn="ctr">
-              <a:lnSpc>
-                <a:spcPct val="100000"/>
-              </a:lnSpc>
-            </a:pPr>
-            <a:r>
-              <a:rPr sz="1200" b="0">
-                <a:solidFill>
-                  <a:srgbClr val="F3EFEB"/>
-                </a:solidFill>
-                <a:latin typeface="JetBrains Mono"/>
-                <a:ea typeface="京華老宋体"/>
-                <a:cs typeface="JetBrains Mono"/>
-              </a:rPr>
-              <a:t>AUTO
-TRIGGER</a:t>
+            <a:pPr>
+              <a:lnSpc>
+                <a:spcPct val="118000"/>
+              </a:lnSpc>
+              <a:spcAft>
+                <a:spcPts val="700"/>
+              </a:spcAft>
+            </a:pPr>
+            <a:r>
+              <a:rPr sz="1100">
+                <a:solidFill>
+                  <a:srgbClr val="4A4947"/>
+                </a:solidFill>
+                <a:latin typeface="Newsreader"/>
+                <a:ea typeface="TsangerJinKai02-W04"/>
+                <a:cs typeface="Newsreader"/>
+              </a:rPr>
+              <a:t>储能订单周期长，但一旦排产稳定，现金流的可见度远高于整车业务。</a:t>
+            </a:r>
+          </a:p>
+          <a:p>
+            <a:pPr>
+              <a:lnSpc>
+                <a:spcPct val="118000"/>
+              </a:lnSpc>
+              <a:spcAft>
+                <a:spcPts val="700"/>
+              </a:spcAft>
+            </a:pPr>
+            <a:r>
+              <a:rPr sz="1100">
+                <a:solidFill>
+                  <a:srgbClr val="4A4947"/>
+                </a:solidFill>
+                <a:latin typeface="Newsreader"/>
+                <a:ea typeface="TsangerJinKai02-W04"/>
+                <a:cs typeface="Newsreader"/>
+              </a:rPr>
+              <a:t>电池分配不再只是车与车之间的竞争，而是车与电网项目之间的配置问题。</a:t>
+            </a:r>
+          </a:p>
+          <a:p>
+            <a:pPr>
+              <a:lnSpc>
+                <a:spcPct val="118000"/>
+              </a:lnSpc>
+              <a:spcAft>
+                <a:spcPts val="700"/>
+              </a:spcAft>
+            </a:pPr>
+            <a:r>
+              <a:rPr sz="1100">
+                <a:solidFill>
+                  <a:srgbClr val="4A4947"/>
+                </a:solidFill>
+                <a:latin typeface="Newsreader"/>
+                <a:ea typeface="TsangerJinKai02-W04"/>
+                <a:cs typeface="Newsreader"/>
+              </a:rPr>
+              <a:t>投资者会开始用项目完工率，而不只是交车数，来判断季度表现。</a:t>
             </a:r>
           </a:p>
         </p:txBody>
@@ -9747,10 +8757,10 @@
                   <a:srgbClr val="8B8782"/>
                 </a:solidFill>
                 <a:latin typeface="JetBrains Mono"/>
-                <a:ea typeface="京華老宋体"/>
+                <a:ea typeface="JetBrains Mono"/>
                 <a:cs typeface="JetBrains Mono"/>
               </a:rPr>
-              <a:t>LAYOUT RHYTHM</a:t>
+              <a:t>ROBOTICS</a:t>
             </a:r>
           </a:p>
         </p:txBody>
@@ -9788,7 +8798,7 @@
                   <a:srgbClr val="8B8782"/>
                 </a:solidFill>
                 <a:latin typeface="JetBrains Mono"/>
-                <a:ea typeface="京華老宋体"/>
+                <a:ea typeface="JetBrains Mono"/>
                 <a:cs typeface="JetBrains Mono"/>
               </a:rPr>
               <a:t>06 / 08</a:t>
@@ -9829,7 +8839,7 @@
                   <a:srgbClr val="8B8782"/>
                 </a:solidFill>
                 <a:latin typeface="JetBrains Mono"/>
-                <a:ea typeface="京華老宋体"/>
+                <a:ea typeface="JetBrains Mono"/>
                 <a:cs typeface="JetBrains Mono"/>
               </a:rPr>
               <a:t>05 · SECTION</a:t>
@@ -9869,11 +8879,11 @@
                 <a:solidFill>
                   <a:srgbClr val="232222"/>
                 </a:solidFill>
-                <a:latin typeface="KingHwa_OldSong"/>
+                <a:latin typeface="Newsreader"/>
                 <a:ea typeface="京華老宋体"/>
-                <a:cs typeface="KingHwa_OldSong"/>
-              </a:rPr>
-              <a:t>排版骨架不变</a:t>
+                <a:cs typeface="Newsreader"/>
+              </a:rPr>
+              <a:t>Optimus 先证明工厂价值，再讲外部市场</a:t>
             </a:r>
           </a:p>
         </p:txBody>
@@ -9945,11 +8955,11 @@
                 <a:solidFill>
                   <a:srgbClr val="666361"/>
                 </a:solidFill>
-                <a:latin typeface="Source Han Sans SC"/>
-                <a:ea typeface="京華老宋体"/>
-                <a:cs typeface="Source Han Sans SC"/>
-              </a:rPr>
-              <a:t>我们换的是时代气质，不是阅读效率。信息密度、留白与页数约束仍然可控。</a:t>
+                <a:latin typeface="Newsreader"/>
+                <a:ea typeface="TsangerJinKai02-W04"/>
+                <a:cs typeface="Newsreader"/>
+              </a:rPr>
+              <a:t>Mock 逻辑：机器人最先成立的场景不是家庭，而是 Tesla 自己的搬运、分拣、巡检和夜班替代。</a:t>
             </a:r>
           </a:p>
         </p:txBody>
@@ -9987,7 +8997,7 @@
                   <a:srgbClr val="8B8782"/>
                 </a:solidFill>
                 <a:latin typeface="JetBrains Mono"/>
-                <a:ea typeface="京華老宋体"/>
+                <a:ea typeface="JetBrains Mono"/>
                 <a:cs typeface="JetBrains Mono"/>
               </a:rPr>
               <a:t>06 / 08</a:t>
@@ -10003,8 +9013,119 @@
         </p:nvSpPr>
         <p:spPr>
           <a:xfrm>
-            <a:off x="1252728" y="2286000"/>
-            <a:ext cx="2011680" cy="1078992"/>
+            <a:off x="1097280" y="2231136"/>
+            <a:ext cx="5577840" cy="3054096"/>
+          </a:xfrm>
+          <a:prstGeom prst="rect">
+            <a:avLst/>
+          </a:prstGeom>
+          <a:solidFill>
+            <a:srgbClr val="F3EFEB"/>
+          </a:solidFill>
+          <a:ln w="8890">
+            <a:solidFill>
+              <a:srgbClr val="4D5B6D"/>
+            </a:solidFill>
+          </a:ln>
+          <a:effectLst/>
+        </p:spPr>
+        <p:style>
+          <a:lnRef idx="1">
+            <a:schemeClr val="accent1"/>
+          </a:lnRef>
+          <a:fillRef idx="3">
+            <a:schemeClr val="accent1"/>
+          </a:fillRef>
+          <a:effectRef idx="2">
+            <a:schemeClr val="accent1"/>
+          </a:effectRef>
+          <a:fontRef idx="minor">
+            <a:schemeClr val="lt1"/>
+          </a:fontRef>
+        </p:style>
+        <p:txBody>
+          <a:bodyPr rtlCol="0" anchor="ctr"/>
+          <a:lstStyle/>
+          <a:p>
+            <a:pPr algn="ctr"/>
+          </a:p>
+        </p:txBody>
+      </p:sp>
+      <p:pic>
+        <p:nvPicPr>
+          <p:cNvPr id="15" name="Picture 14" descr="mock-tesla-optimus.png"/>
+          <p:cNvPicPr>
+            <a:picLocks noChangeAspect="1"/>
+          </p:cNvPicPr>
+          <p:nvPr/>
+        </p:nvPicPr>
+        <p:blipFill>
+          <a:blip r:embed="rId3"/>
+          <a:stretch>
+            <a:fillRect/>
+          </a:stretch>
+        </p:blipFill>
+        <p:spPr>
+          <a:xfrm>
+            <a:off x="1097280" y="2231136"/>
+            <a:ext cx="5577840" cy="2706624"/>
+          </a:xfrm>
+          <a:prstGeom prst="rect">
+            <a:avLst/>
+          </a:prstGeom>
+        </p:spPr>
+      </p:pic>
+      <p:sp>
+        <p:nvSpPr>
+          <p:cNvPr id="16" name="TextBox 15"/>
+          <p:cNvSpPr txBox="1"/>
+          <p:nvPr/>
+        </p:nvSpPr>
+        <p:spPr>
+          <a:xfrm>
+            <a:off x="1261872" y="4992624"/>
+            <a:ext cx="5248656" cy="146304"/>
+          </a:xfrm>
+          <a:prstGeom prst="rect">
+            <a:avLst/>
+          </a:prstGeom>
+          <a:noFill/>
+        </p:spPr>
+        <p:txBody>
+          <a:bodyPr wrap="square" lIns="0" rIns="0" tIns="0" bIns="0" anchor="t">
+            <a:spAutoFit/>
+          </a:bodyPr>
+          <a:lstStyle/>
+          <a:p>
+            <a:pPr algn="l">
+              <a:lnSpc>
+                <a:spcPct val="100000"/>
+              </a:lnSpc>
+            </a:pPr>
+            <a:r>
+              <a:rPr sz="750" b="0">
+                <a:solidFill>
+                  <a:srgbClr val="8B8782"/>
+                </a:solidFill>
+                <a:latin typeface="JetBrains Mono"/>
+                <a:ea typeface="JetBrains Mono"/>
+                <a:cs typeface="JetBrains Mono"/>
+              </a:rPr>
+              <a:t>MOCK VISUAL · OPTIMUS 在厂内搬运与巡检</a:t>
+            </a:r>
+          </a:p>
+        </p:txBody>
+      </p:sp>
+      <p:sp>
+        <p:nvSpPr>
+          <p:cNvPr id="17" name="Rectangle 16"/>
+          <p:cNvSpPr/>
+          <p:nvPr/>
+        </p:nvSpPr>
+        <p:spPr>
+          <a:xfrm>
+            <a:off x="6949440" y="2304288"/>
+            <a:ext cx="1901952" cy="1078992"/>
           </a:xfrm>
           <a:prstGeom prst="rect">
             <a:avLst/>
@@ -10043,14 +9164,14 @@
       </p:sp>
       <p:sp>
         <p:nvSpPr>
-          <p:cNvPr id="15" name="TextBox 14"/>
+          <p:cNvPr id="18" name="TextBox 17"/>
           <p:cNvSpPr txBox="1"/>
           <p:nvPr/>
         </p:nvSpPr>
         <p:spPr>
           <a:xfrm>
-            <a:off x="1417320" y="2432304"/>
-            <a:ext cx="1682496" cy="347472"/>
+            <a:off x="7114032" y="2450592"/>
+            <a:ext cx="1572768" cy="347472"/>
           </a:xfrm>
           <a:prstGeom prst="rect">
             <a:avLst/>
@@ -10073,25 +9194,25 @@
                 <a:solidFill>
                   <a:srgbClr val="243851"/>
                 </a:solidFill>
-                <a:latin typeface="KingHwa_OldSong"/>
+                <a:latin typeface="Newsreader"/>
                 <a:ea typeface="京華老宋体"/>
-                <a:cs typeface="KingHwa_OldSong"/>
-              </a:rPr>
-              <a:t>1</a:t>
-            </a:r>
-          </a:p>
-        </p:txBody>
-      </p:sp>
-      <p:sp>
-        <p:nvSpPr>
-          <p:cNvPr id="16" name="TextBox 15"/>
+                <a:cs typeface="Newsreader"/>
+              </a:rPr>
+              <a:t>18k</a:t>
+            </a:r>
+          </a:p>
+        </p:txBody>
+      </p:sp>
+      <p:sp>
+        <p:nvSpPr>
+          <p:cNvPr id="19" name="TextBox 18"/>
           <p:cNvSpPr txBox="1"/>
           <p:nvPr/>
         </p:nvSpPr>
         <p:spPr>
           <a:xfrm>
-            <a:off x="1417320" y="2816352"/>
-            <a:ext cx="1682496" cy="164592"/>
+            <a:off x="7114032" y="2834640"/>
+            <a:ext cx="1572768" cy="164592"/>
           </a:xfrm>
           <a:prstGeom prst="rect">
             <a:avLst/>
@@ -10114,25 +9235,25 @@
                 <a:solidFill>
                   <a:srgbClr val="8B8782"/>
                 </a:solidFill>
-                <a:latin typeface="Source Han Sans SC"/>
-                <a:ea typeface="京華老宋体"/>
-                <a:cs typeface="Source Han Sans SC"/>
-              </a:rPr>
-              <a:t>ONE-PAGER</a:t>
-            </a:r>
-          </a:p>
-        </p:txBody>
-      </p:sp>
-      <p:sp>
-        <p:nvSpPr>
-          <p:cNvPr id="17" name="TextBox 16"/>
+                <a:latin typeface="Newsreader"/>
+                <a:ea typeface="TsangerJinKai02-W04"/>
+                <a:cs typeface="Newsreader"/>
+              </a:rPr>
+              <a:t>INTERNAL UNITS</a:t>
+            </a:r>
+          </a:p>
+        </p:txBody>
+      </p:sp>
+      <p:sp>
+        <p:nvSpPr>
+          <p:cNvPr id="20" name="TextBox 19"/>
           <p:cNvSpPr txBox="1"/>
           <p:nvPr/>
         </p:nvSpPr>
         <p:spPr>
           <a:xfrm>
-            <a:off x="1417320" y="3035808"/>
-            <a:ext cx="1682496" cy="182880"/>
+            <a:off x="7114032" y="3054096"/>
+            <a:ext cx="1572768" cy="182880"/>
           </a:xfrm>
           <a:prstGeom prst="rect">
             <a:avLst/>
@@ -10155,25 +9276,25 @@
                 <a:solidFill>
                   <a:srgbClr val="666361"/>
                 </a:solidFill>
-                <a:latin typeface="Source Han Sans SC"/>
-                <a:ea typeface="京華老宋体"/>
-                <a:cs typeface="Source Han Sans SC"/>
-              </a:rPr>
-              <a:t>严格单页</a:t>
-            </a:r>
-          </a:p>
-        </p:txBody>
-      </p:sp>
-      <p:sp>
-        <p:nvSpPr>
-          <p:cNvPr id="18" name="Rectangle 17"/>
+                <a:latin typeface="Newsreader"/>
+                <a:ea typeface="TsangerJinKai02-W04"/>
+                <a:cs typeface="Newsreader"/>
+              </a:rPr>
+              <a:t>厂内部署节拍</a:t>
+            </a:r>
+          </a:p>
+        </p:txBody>
+      </p:sp>
+      <p:sp>
+        <p:nvSpPr>
+          <p:cNvPr id="21" name="Rectangle 20"/>
           <p:cNvSpPr/>
           <p:nvPr/>
         </p:nvSpPr>
         <p:spPr>
           <a:xfrm>
-            <a:off x="3566160" y="2286000"/>
-            <a:ext cx="2011680" cy="1078992"/>
+            <a:off x="9015984" y="2304288"/>
+            <a:ext cx="1901952" cy="1078992"/>
           </a:xfrm>
           <a:prstGeom prst="rect">
             <a:avLst/>
@@ -10212,14 +9333,14 @@
       </p:sp>
       <p:sp>
         <p:nvSpPr>
-          <p:cNvPr id="19" name="TextBox 18"/>
+          <p:cNvPr id="22" name="TextBox 21"/>
           <p:cNvSpPr txBox="1"/>
           <p:nvPr/>
         </p:nvSpPr>
         <p:spPr>
           <a:xfrm>
-            <a:off x="3730752" y="2432304"/>
-            <a:ext cx="1682496" cy="347472"/>
+            <a:off x="9180576" y="2450592"/>
+            <a:ext cx="1572768" cy="347472"/>
           </a:xfrm>
           <a:prstGeom prst="rect">
             <a:avLst/>
@@ -10242,25 +9363,25 @@
                 <a:solidFill>
                   <a:srgbClr val="243851"/>
                 </a:solidFill>
-                <a:latin typeface="KingHwa_OldSong"/>
+                <a:latin typeface="Newsreader"/>
                 <a:ea typeface="京華老宋体"/>
-                <a:cs typeface="KingHwa_OldSong"/>
-              </a:rPr>
-              <a:t>1</a:t>
-            </a:r>
-          </a:p>
-        </p:txBody>
-      </p:sp>
-      <p:sp>
-        <p:nvSpPr>
-          <p:cNvPr id="20" name="TextBox 19"/>
+                <a:cs typeface="Newsreader"/>
+              </a:rPr>
+              <a:t>23%</a:t>
+            </a:r>
+          </a:p>
+        </p:txBody>
+      </p:sp>
+      <p:sp>
+        <p:nvSpPr>
+          <p:cNvPr id="23" name="TextBox 22"/>
           <p:cNvSpPr txBox="1"/>
           <p:nvPr/>
         </p:nvSpPr>
         <p:spPr>
           <a:xfrm>
-            <a:off x="3730752" y="2816352"/>
-            <a:ext cx="1682496" cy="164592"/>
+            <a:off x="9180576" y="2834640"/>
+            <a:ext cx="1572768" cy="164592"/>
           </a:xfrm>
           <a:prstGeom prst="rect">
             <a:avLst/>
@@ -10283,25 +9404,25 @@
                 <a:solidFill>
                   <a:srgbClr val="8B8782"/>
                 </a:solidFill>
-                <a:latin typeface="Source Han Sans SC"/>
-                <a:ea typeface="京華老宋体"/>
-                <a:cs typeface="Source Han Sans SC"/>
-              </a:rPr>
-              <a:t>LETTER</a:t>
-            </a:r>
-          </a:p>
-        </p:txBody>
-      </p:sp>
-      <p:sp>
-        <p:nvSpPr>
-          <p:cNvPr id="21" name="TextBox 20"/>
+                <a:latin typeface="Newsreader"/>
+                <a:ea typeface="TsangerJinKai02-W04"/>
+                <a:cs typeface="Newsreader"/>
+              </a:rPr>
+              <a:t>LABOR HOURS</a:t>
+            </a:r>
+          </a:p>
+        </p:txBody>
+      </p:sp>
+      <p:sp>
+        <p:nvSpPr>
+          <p:cNvPr id="24" name="TextBox 23"/>
           <p:cNvSpPr txBox="1"/>
           <p:nvPr/>
         </p:nvSpPr>
         <p:spPr>
           <a:xfrm>
-            <a:off x="3730752" y="3035808"/>
-            <a:ext cx="1682496" cy="182880"/>
+            <a:off x="9180576" y="3054096"/>
+            <a:ext cx="1572768" cy="182880"/>
           </a:xfrm>
           <a:prstGeom prst="rect">
             <a:avLst/>
@@ -10324,139 +9445,11 @@
                 <a:solidFill>
                   <a:srgbClr val="666361"/>
                 </a:solidFill>
-                <a:latin typeface="Source Han Sans SC"/>
-                <a:ea typeface="京華老宋体"/>
-                <a:cs typeface="Source Han Sans SC"/>
-              </a:rPr>
-              <a:t>严格单页</a:t>
-            </a:r>
-          </a:p>
-        </p:txBody>
-      </p:sp>
-      <p:sp>
-        <p:nvSpPr>
-          <p:cNvPr id="22" name="Rectangle 21"/>
-          <p:cNvSpPr/>
-          <p:nvPr/>
-        </p:nvSpPr>
-        <p:spPr>
-          <a:xfrm>
-            <a:off x="5879592" y="2286000"/>
-            <a:ext cx="2011680" cy="1078992"/>
-          </a:xfrm>
-          <a:prstGeom prst="rect">
-            <a:avLst/>
-          </a:prstGeom>
-          <a:solidFill>
-            <a:srgbClr val="F3EFEB"/>
-          </a:solidFill>
-          <a:ln w="10160">
-            <a:solidFill>
-              <a:srgbClr val="4D5B6D"/>
-            </a:solidFill>
-          </a:ln>
-          <a:effectLst/>
-        </p:spPr>
-        <p:style>
-          <a:lnRef idx="1">
-            <a:schemeClr val="accent1"/>
-          </a:lnRef>
-          <a:fillRef idx="3">
-            <a:schemeClr val="accent1"/>
-          </a:fillRef>
-          <a:effectRef idx="2">
-            <a:schemeClr val="accent1"/>
-          </a:effectRef>
-          <a:fontRef idx="minor">
-            <a:schemeClr val="lt1"/>
-          </a:fontRef>
-        </p:style>
-        <p:txBody>
-          <a:bodyPr rtlCol="0" anchor="ctr"/>
-          <a:lstStyle/>
-          <a:p>
-            <a:pPr algn="ctr"/>
-          </a:p>
-        </p:txBody>
-      </p:sp>
-      <p:sp>
-        <p:nvSpPr>
-          <p:cNvPr id="23" name="TextBox 22"/>
-          <p:cNvSpPr txBox="1"/>
-          <p:nvPr/>
-        </p:nvSpPr>
-        <p:spPr>
-          <a:xfrm>
-            <a:off x="6044184" y="2432304"/>
-            <a:ext cx="1682496" cy="347472"/>
-          </a:xfrm>
-          <a:prstGeom prst="rect">
-            <a:avLst/>
-          </a:prstGeom>
-          <a:noFill/>
-        </p:spPr>
-        <p:txBody>
-          <a:bodyPr wrap="square" lIns="0" rIns="0" tIns="0" bIns="0" anchor="t">
-            <a:spAutoFit/>
-          </a:bodyPr>
-          <a:lstStyle/>
-          <a:p>
-            <a:pPr algn="l">
-              <a:lnSpc>
-                <a:spcPct val="100000"/>
-              </a:lnSpc>
-            </a:pPr>
-            <a:r>
-              <a:rPr sz="2400" b="0">
-                <a:solidFill>
-                  <a:srgbClr val="243851"/>
-                </a:solidFill>
-                <a:latin typeface="KingHwa_OldSong"/>
-                <a:ea typeface="京華老宋体"/>
-                <a:cs typeface="KingHwa_OldSong"/>
-              </a:rPr>
-              <a:t>3</a:t>
-            </a:r>
-          </a:p>
-        </p:txBody>
-      </p:sp>
-      <p:sp>
-        <p:nvSpPr>
-          <p:cNvPr id="24" name="TextBox 23"/>
-          <p:cNvSpPr txBox="1"/>
-          <p:nvPr/>
-        </p:nvSpPr>
-        <p:spPr>
-          <a:xfrm>
-            <a:off x="6044184" y="2816352"/>
-            <a:ext cx="1682496" cy="164592"/>
-          </a:xfrm>
-          <a:prstGeom prst="rect">
-            <a:avLst/>
-          </a:prstGeom>
-          <a:noFill/>
-        </p:spPr>
-        <p:txBody>
-          <a:bodyPr wrap="square" lIns="0" rIns="0" tIns="0" bIns="0" anchor="t">
-            <a:spAutoFit/>
-          </a:bodyPr>
-          <a:lstStyle/>
-          <a:p>
-            <a:pPr algn="l">
-              <a:lnSpc>
-                <a:spcPct val="100000"/>
-              </a:lnSpc>
-            </a:pPr>
-            <a:r>
-              <a:rPr sz="850" b="0">
-                <a:solidFill>
-                  <a:srgbClr val="8B8782"/>
-                </a:solidFill>
-                <a:latin typeface="Source Han Sans SC"/>
-                <a:ea typeface="京華老宋体"/>
-                <a:cs typeface="Source Han Sans SC"/>
-              </a:rPr>
-              <a:t>DEMO LONG-DOC</a:t>
+                <a:latin typeface="Newsreader"/>
+                <a:ea typeface="TsangerJinKai02-W04"/>
+                <a:cs typeface="Newsreader"/>
+              </a:rPr>
+              <a:t>重复工时替代</a:t>
             </a:r>
           </a:p>
         </p:txBody>
@@ -10469,218 +9462,8 @@
         </p:nvSpPr>
         <p:spPr>
           <a:xfrm>
-            <a:off x="6044184" y="3035808"/>
-            <a:ext cx="1682496" cy="182880"/>
-          </a:xfrm>
-          <a:prstGeom prst="rect">
-            <a:avLst/>
-          </a:prstGeom>
-          <a:noFill/>
-        </p:spPr>
-        <p:txBody>
-          <a:bodyPr wrap="square" lIns="0" rIns="0" tIns="0" bIns="0" anchor="t">
-            <a:spAutoFit/>
-          </a:bodyPr>
-          <a:lstStyle/>
-          <a:p>
-            <a:pPr algn="l">
-              <a:lnSpc>
-                <a:spcPct val="100000"/>
-              </a:lnSpc>
-            </a:pPr>
-            <a:r>
-              <a:rPr sz="850" b="0">
-                <a:solidFill>
-                  <a:srgbClr val="666361"/>
-                </a:solidFill>
-                <a:latin typeface="Source Han Sans SC"/>
-                <a:ea typeface="京華老宋体"/>
-                <a:cs typeface="Source Han Sans SC"/>
-              </a:rPr>
-              <a:t>章节展开</a:t>
-            </a:r>
-          </a:p>
-        </p:txBody>
-      </p:sp>
-      <p:sp>
-        <p:nvSpPr>
-          <p:cNvPr id="26" name="Rectangle 25"/>
-          <p:cNvSpPr/>
-          <p:nvPr/>
-        </p:nvSpPr>
-        <p:spPr>
-          <a:xfrm>
-            <a:off x="8193023" y="2286000"/>
-            <a:ext cx="2011680" cy="1078992"/>
-          </a:xfrm>
-          <a:prstGeom prst="rect">
-            <a:avLst/>
-          </a:prstGeom>
-          <a:solidFill>
-            <a:srgbClr val="F3EFEB"/>
-          </a:solidFill>
-          <a:ln w="10160">
-            <a:solidFill>
-              <a:srgbClr val="4D5B6D"/>
-            </a:solidFill>
-          </a:ln>
-          <a:effectLst/>
-        </p:spPr>
-        <p:style>
-          <a:lnRef idx="1">
-            <a:schemeClr val="accent1"/>
-          </a:lnRef>
-          <a:fillRef idx="3">
-            <a:schemeClr val="accent1"/>
-          </a:fillRef>
-          <a:effectRef idx="2">
-            <a:schemeClr val="accent1"/>
-          </a:effectRef>
-          <a:fontRef idx="minor">
-            <a:schemeClr val="lt1"/>
-          </a:fontRef>
-        </p:style>
-        <p:txBody>
-          <a:bodyPr rtlCol="0" anchor="ctr"/>
-          <a:lstStyle/>
-          <a:p>
-            <a:pPr algn="ctr"/>
-          </a:p>
-        </p:txBody>
-      </p:sp>
-      <p:sp>
-        <p:nvSpPr>
-          <p:cNvPr id="27" name="TextBox 26"/>
-          <p:cNvSpPr txBox="1"/>
-          <p:nvPr/>
-        </p:nvSpPr>
-        <p:spPr>
-          <a:xfrm>
-            <a:off x="8357615" y="2432304"/>
-            <a:ext cx="1682496" cy="347472"/>
-          </a:xfrm>
-          <a:prstGeom prst="rect">
-            <a:avLst/>
-          </a:prstGeom>
-          <a:noFill/>
-        </p:spPr>
-        <p:txBody>
-          <a:bodyPr wrap="square" lIns="0" rIns="0" tIns="0" bIns="0" anchor="t">
-            <a:spAutoFit/>
-          </a:bodyPr>
-          <a:lstStyle/>
-          <a:p>
-            <a:pPr algn="l">
-              <a:lnSpc>
-                <a:spcPct val="100000"/>
-              </a:lnSpc>
-            </a:pPr>
-            <a:r>
-              <a:rPr sz="2400" b="0">
-                <a:solidFill>
-                  <a:srgbClr val="243851"/>
-                </a:solidFill>
-                <a:latin typeface="KingHwa_OldSong"/>
-                <a:ea typeface="京華老宋体"/>
-                <a:cs typeface="KingHwa_OldSong"/>
-              </a:rPr>
-              <a:t>500+</a:t>
-            </a:r>
-          </a:p>
-        </p:txBody>
-      </p:sp>
-      <p:sp>
-        <p:nvSpPr>
-          <p:cNvPr id="28" name="TextBox 27"/>
-          <p:cNvSpPr txBox="1"/>
-          <p:nvPr/>
-        </p:nvSpPr>
-        <p:spPr>
-          <a:xfrm>
-            <a:off x="8357615" y="2816352"/>
-            <a:ext cx="1682496" cy="164592"/>
-          </a:xfrm>
-          <a:prstGeom prst="rect">
-            <a:avLst/>
-          </a:prstGeom>
-          <a:noFill/>
-        </p:spPr>
-        <p:txBody>
-          <a:bodyPr wrap="square" lIns="0" rIns="0" tIns="0" bIns="0" anchor="t">
-            <a:spAutoFit/>
-          </a:bodyPr>
-          <a:lstStyle/>
-          <a:p>
-            <a:pPr algn="l">
-              <a:lnSpc>
-                <a:spcPct val="100000"/>
-              </a:lnSpc>
-            </a:pPr>
-            <a:r>
-              <a:rPr sz="850" b="0">
-                <a:solidFill>
-                  <a:srgbClr val="8B8782"/>
-                </a:solidFill>
-                <a:latin typeface="Source Han Sans SC"/>
-                <a:ea typeface="京華老宋体"/>
-                <a:cs typeface="Source Han Sans SC"/>
-              </a:rPr>
-              <a:t>CHECK RULES</a:t>
-            </a:r>
-          </a:p>
-        </p:txBody>
-      </p:sp>
-      <p:sp>
-        <p:nvSpPr>
-          <p:cNvPr id="29" name="TextBox 28"/>
-          <p:cNvSpPr txBox="1"/>
-          <p:nvPr/>
-        </p:nvSpPr>
-        <p:spPr>
-          <a:xfrm>
-            <a:off x="8357615" y="3035808"/>
-            <a:ext cx="1682496" cy="182880"/>
-          </a:xfrm>
-          <a:prstGeom prst="rect">
-            <a:avLst/>
-          </a:prstGeom>
-          <a:noFill/>
-        </p:spPr>
-        <p:txBody>
-          <a:bodyPr wrap="square" lIns="0" rIns="0" tIns="0" bIns="0" anchor="t">
-            <a:spAutoFit/>
-          </a:bodyPr>
-          <a:lstStyle/>
-          <a:p>
-            <a:pPr algn="l">
-              <a:lnSpc>
-                <a:spcPct val="100000"/>
-              </a:lnSpc>
-            </a:pPr>
-            <a:r>
-              <a:rPr sz="850" b="0">
-                <a:solidFill>
-                  <a:srgbClr val="666361"/>
-                </a:solidFill>
-                <a:latin typeface="Source Han Sans SC"/>
-                <a:ea typeface="京華老宋体"/>
-                <a:cs typeface="Source Han Sans SC"/>
-              </a:rPr>
-              <a:t>字体 / CSS / 占位符</a:t>
-            </a:r>
-          </a:p>
-        </p:txBody>
-      </p:sp>
-      <p:sp>
-        <p:nvSpPr>
-          <p:cNvPr id="30" name="TextBox 29"/>
-          <p:cNvSpPr txBox="1"/>
-          <p:nvPr/>
-        </p:nvSpPr>
-        <p:spPr>
-          <a:xfrm>
-            <a:off x="1389888" y="4270248"/>
-            <a:ext cx="9692640" cy="1097280"/>
+            <a:off x="6949440" y="3785616"/>
+            <a:ext cx="3749039" cy="1481328"/>
           </a:xfrm>
           <a:prstGeom prst="rect">
             <a:avLst/>
@@ -10702,15 +9485,15 @@
               </a:spcAft>
             </a:pPr>
             <a:r>
-              <a:rPr sz="1500">
+              <a:rPr sz="1100">
                 <a:solidFill>
                   <a:srgbClr val="4A4947"/>
                 </a:solidFill>
-                <a:latin typeface="Source Han Sans SC"/>
-                <a:ea typeface="京華老宋体"/>
-                <a:cs typeface="Source Han Sans SC"/>
-              </a:rPr>
-              <a:t>旧纸底不是装饰图，而是稳定色块。</a:t>
+                <a:latin typeface="Newsreader"/>
+                <a:ea typeface="TsangerJinKai02-W04"/>
+                <a:cs typeface="Newsreader"/>
+              </a:rPr>
+              <a:t>第一阶段看单位替代工时，而不是对外销量。</a:t>
             </a:r>
           </a:p>
           <a:p>
@@ -10723,15 +9506,15 @@
               </a:spcAft>
             </a:pPr>
             <a:r>
-              <a:rPr sz="1500">
+              <a:rPr sz="1100">
                 <a:solidFill>
                   <a:srgbClr val="4A4947"/>
                 </a:solidFill>
-                <a:latin typeface="Source Han Sans SC"/>
-                <a:ea typeface="京華老宋体"/>
-                <a:cs typeface="Source Han Sans SC"/>
-              </a:rPr>
-              <a:t>题签和细线负责时代感，正文仍按专业文档阅读。</a:t>
+                <a:latin typeface="Newsreader"/>
+                <a:ea typeface="TsangerJinKai02-W04"/>
+                <a:cs typeface="Newsreader"/>
+              </a:rPr>
+              <a:t>机器人能力演进会反过来倒逼工厂物料标准化与工站重构。</a:t>
             </a:r>
           </a:p>
           <a:p>
@@ -10744,15 +9527,15 @@
               </a:spcAft>
             </a:pPr>
             <a:r>
-              <a:rPr sz="1500">
+              <a:rPr sz="1100">
                 <a:solidFill>
                   <a:srgbClr val="4A4947"/>
                 </a:solidFill>
-                <a:latin typeface="Source Han Sans SC"/>
-                <a:ea typeface="京華老宋体"/>
-                <a:cs typeface="Source Han Sans SC"/>
-              </a:rPr>
-              <a:t>京華老宋体用于 serif 气质，功能文字保持清晰。</a:t>
+                <a:latin typeface="Newsreader"/>
+                <a:ea typeface="TsangerJinKai02-W04"/>
+                <a:cs typeface="Newsreader"/>
+              </a:rPr>
+              <a:t>只有先在自家场景跑通，外部客户才会把它视为工业设备而不是演示品。</a:t>
             </a:r>
           </a:p>
         </p:txBody>
@@ -11008,10 +9791,10 @@
                   <a:srgbClr val="8B8782"/>
                 </a:solidFill>
                 <a:latin typeface="JetBrains Mono"/>
-                <a:ea typeface="京華老宋体"/>
+                <a:ea typeface="JetBrains Mono"/>
                 <a:cs typeface="JetBrains Mono"/>
               </a:rPr>
-              <a:t>DELIVERY</a:t>
+              <a:t>CHECKPOINTS</a:t>
             </a:r>
           </a:p>
         </p:txBody>
@@ -11049,7 +9832,7 @@
                   <a:srgbClr val="8B8782"/>
                 </a:solidFill>
                 <a:latin typeface="JetBrains Mono"/>
-                <a:ea typeface="京華老宋体"/>
+                <a:ea typeface="JetBrains Mono"/>
                 <a:cs typeface="JetBrains Mono"/>
               </a:rPr>
               <a:t>07 / 08</a:t>
@@ -11090,7 +9873,7 @@
                   <a:srgbClr val="8B8782"/>
                 </a:solidFill>
                 <a:latin typeface="JetBrains Mono"/>
-                <a:ea typeface="京華老宋体"/>
+                <a:ea typeface="JetBrains Mono"/>
                 <a:cs typeface="JetBrains Mono"/>
               </a:rPr>
               <a:t>06 · SECTION</a:t>
@@ -11130,11 +9913,11 @@
                 <a:solidFill>
                   <a:srgbClr val="232222"/>
                 </a:solidFill>
-                <a:latin typeface="KingHwa_OldSong"/>
+                <a:latin typeface="Newsreader"/>
                 <a:ea typeface="京華老宋体"/>
-                <a:cs typeface="KingHwa_OldSong"/>
-              </a:rPr>
-              <a:t>交付链路</a:t>
+                <a:cs typeface="Newsreader"/>
+              </a:rPr>
+              <a:t>未来 18 个月看这五个检查点</a:t>
             </a:r>
           </a:p>
         </p:txBody>
@@ -11206,11 +9989,11 @@
                 <a:solidFill>
                   <a:srgbClr val="666361"/>
                 </a:solidFill>
-                <a:latin typeface="Source Han Sans SC"/>
-                <a:ea typeface="京華老宋体"/>
-                <a:cs typeface="Source Han Sans SC"/>
-              </a:rPr>
-              <a:t>生成不止是写文件，还要让 PDF/PPTX 和预览资产都能被检查。</a:t>
+                <a:latin typeface="Newsreader"/>
+                <a:ea typeface="TsangerJinKai02-W04"/>
+                <a:cs typeface="Newsreader"/>
+              </a:rPr>
+              <a:t>如果这五个点依次兑现，Tesla 的叙事会从单一汽车股，切换到多业务平台公司。</a:t>
             </a:r>
           </a:p>
         </p:txBody>
@@ -11248,7 +10031,7 @@
                   <a:srgbClr val="8B8782"/>
                 </a:solidFill>
                 <a:latin typeface="JetBrains Mono"/>
-                <a:ea typeface="京華老宋体"/>
+                <a:ea typeface="JetBrains Mono"/>
                 <a:cs typeface="JetBrains Mono"/>
               </a:rPr>
               <a:t>07 / 08</a:t>
@@ -11264,8 +10047,8 @@
         </p:nvSpPr>
         <p:spPr>
           <a:xfrm>
-            <a:off x="1207008" y="2852928"/>
-            <a:ext cx="2148840" cy="1170432"/>
+            <a:off x="1069848" y="2240279"/>
+            <a:ext cx="3072384" cy="1115568"/>
           </a:xfrm>
           <a:prstGeom prst="rect">
             <a:avLst/>
@@ -11310,8 +10093,8 @@
         </p:nvSpPr>
         <p:spPr>
           <a:xfrm>
-            <a:off x="1207008" y="2852928"/>
-            <a:ext cx="2148840" cy="310896"/>
+            <a:off x="1069848" y="2240279"/>
+            <a:ext cx="3072384" cy="310896"/>
           </a:xfrm>
           <a:prstGeom prst="rect">
             <a:avLst/>
@@ -11354,8 +10137,8 @@
         </p:nvSpPr>
         <p:spPr>
           <a:xfrm>
-            <a:off x="1371600" y="2944368"/>
-            <a:ext cx="1819656" cy="109728"/>
+            <a:off x="1234440" y="2331719"/>
+            <a:ext cx="2743200" cy="109728"/>
           </a:xfrm>
           <a:prstGeom prst="rect">
             <a:avLst/>
@@ -11379,10 +10162,10 @@
                   <a:srgbClr val="D5DEE7"/>
                 </a:solidFill>
                 <a:latin typeface="JetBrains Mono"/>
-                <a:ea typeface="京華老宋体"/>
+                <a:ea typeface="JetBrains Mono"/>
                 <a:cs typeface="JetBrains Mono"/>
               </a:rPr>
-              <a:t>01</a:t>
+              <a:t>Q3</a:t>
             </a:r>
           </a:p>
         </p:txBody>
@@ -11395,8 +10178,8 @@
         </p:nvSpPr>
         <p:spPr>
           <a:xfrm>
-            <a:off x="1389888" y="3291840"/>
-            <a:ext cx="1783080" cy="310896"/>
+            <a:off x="1252728" y="2679191"/>
+            <a:ext cx="2706624" cy="310896"/>
           </a:xfrm>
           <a:prstGeom prst="rect">
             <a:avLst/>
@@ -11419,11 +10202,11 @@
                 <a:solidFill>
                   <a:srgbClr val="232222"/>
                 </a:solidFill>
-                <a:latin typeface="KingHwa_OldSong"/>
+                <a:latin typeface="Newsreader"/>
                 <a:ea typeface="京華老宋体"/>
-                <a:cs typeface="KingHwa_OldSong"/>
-              </a:rPr>
-              <a:t>HTML / PPTX</a:t>
+                <a:cs typeface="Newsreader"/>
+              </a:rPr>
+              <a:t>Factory Switch</a:t>
             </a:r>
           </a:p>
         </p:txBody>
@@ -11436,8 +10219,8 @@
         </p:nvSpPr>
         <p:spPr>
           <a:xfrm>
-            <a:off x="1389888" y="3730752"/>
-            <a:ext cx="1783080" cy="475488"/>
+            <a:off x="1252728" y="3118103"/>
+            <a:ext cx="2706624" cy="420624"/>
           </a:xfrm>
           <a:prstGeom prst="rect">
             <a:avLst/>
@@ -11460,60 +10243,25 @@
                 <a:solidFill>
                   <a:srgbClr val="4A4947"/>
                 </a:solidFill>
-                <a:latin typeface="Source Han Sans SC"/>
-                <a:ea typeface="京華老宋体"/>
-                <a:cs typeface="Source Han Sans SC"/>
-              </a:rPr>
-              <a:t>内容进入固定模板</a:t>
-            </a:r>
-          </a:p>
-        </p:txBody>
-      </p:sp>
-      <p:cxnSp>
-        <p:nvCxnSpPr>
-          <p:cNvPr id="19" name="Connector 18"/>
-          <p:cNvCxnSpPr/>
-          <p:nvPr/>
-        </p:nvCxnSpPr>
-        <p:spPr>
-          <a:xfrm>
-            <a:off x="3447288" y="3438144"/>
-            <a:ext cx="292608" cy="0"/>
-          </a:xfrm>
-          <a:prstGeom prst="line">
-            <a:avLst/>
-          </a:prstGeom>
-          <a:ln w="12700">
-            <a:solidFill>
-              <a:srgbClr val="4D5B6D"/>
-            </a:solidFill>
-          </a:ln>
-        </p:spPr>
-        <p:style>
-          <a:lnRef idx="2">
-            <a:schemeClr val="accent1"/>
-          </a:lnRef>
-          <a:fillRef idx="0">
-            <a:schemeClr val="accent1"/>
-          </a:fillRef>
-          <a:effectRef idx="1">
-            <a:schemeClr val="accent1"/>
-          </a:effectRef>
-          <a:fontRef idx="minor">
-            <a:schemeClr val="tx1"/>
-          </a:fontRef>
-        </p:style>
-      </p:cxnSp>
-      <p:sp>
-        <p:nvSpPr>
-          <p:cNvPr id="20" name="Rectangle 19"/>
+                <a:latin typeface="Newsreader"/>
+                <a:ea typeface="TsangerJinKai02-W04"/>
+                <a:cs typeface="Newsreader"/>
+              </a:rPr>
+              <a:t>新平台切线期间的良率、库存与现金转换。</a:t>
+            </a:r>
+          </a:p>
+        </p:txBody>
+      </p:sp>
+      <p:sp>
+        <p:nvSpPr>
+          <p:cNvPr id="19" name="Rectangle 18"/>
           <p:cNvSpPr/>
           <p:nvPr/>
         </p:nvSpPr>
         <p:spPr>
           <a:xfrm>
-            <a:off x="3822192" y="2852928"/>
-            <a:ext cx="2148840" cy="1170432"/>
+            <a:off x="4544568" y="2240279"/>
+            <a:ext cx="3072384" cy="1115568"/>
           </a:xfrm>
           <a:prstGeom prst="rect">
             <a:avLst/>
@@ -11552,14 +10300,14 @@
       </p:sp>
       <p:sp>
         <p:nvSpPr>
-          <p:cNvPr id="21" name="Rectangle 20"/>
+          <p:cNvPr id="20" name="Rectangle 19"/>
           <p:cNvSpPr/>
           <p:nvPr/>
         </p:nvSpPr>
         <p:spPr>
           <a:xfrm>
-            <a:off x="3822192" y="2852928"/>
-            <a:ext cx="2148840" cy="310896"/>
+            <a:off x="4544568" y="2240279"/>
+            <a:ext cx="3072384" cy="310896"/>
           </a:xfrm>
           <a:prstGeom prst="rect">
             <a:avLst/>
@@ -11596,14 +10344,14 @@
       </p:sp>
       <p:sp>
         <p:nvSpPr>
-          <p:cNvPr id="22" name="TextBox 21"/>
+          <p:cNvPr id="21" name="TextBox 20"/>
           <p:cNvSpPr txBox="1"/>
           <p:nvPr/>
         </p:nvSpPr>
         <p:spPr>
           <a:xfrm>
-            <a:off x="3986784" y="2944368"/>
-            <a:ext cx="1819656" cy="109728"/>
+            <a:off x="4709160" y="2331719"/>
+            <a:ext cx="2743200" cy="109728"/>
           </a:xfrm>
           <a:prstGeom prst="rect">
             <a:avLst/>
@@ -11627,24 +10375,24 @@
                   <a:srgbClr val="D5DEE7"/>
                 </a:solidFill>
                 <a:latin typeface="JetBrains Mono"/>
-                <a:ea typeface="京華老宋体"/>
+                <a:ea typeface="JetBrains Mono"/>
                 <a:cs typeface="JetBrains Mono"/>
               </a:rPr>
-              <a:t>02</a:t>
-            </a:r>
-          </a:p>
-        </p:txBody>
-      </p:sp>
-      <p:sp>
-        <p:nvSpPr>
-          <p:cNvPr id="23" name="TextBox 22"/>
+              <a:t>Q4</a:t>
+            </a:r>
+          </a:p>
+        </p:txBody>
+      </p:sp>
+      <p:sp>
+        <p:nvSpPr>
+          <p:cNvPr id="22" name="TextBox 21"/>
           <p:cNvSpPr txBox="1"/>
           <p:nvPr/>
         </p:nvSpPr>
         <p:spPr>
           <a:xfrm>
-            <a:off x="4005072" y="3291840"/>
-            <a:ext cx="1783080" cy="310896"/>
+            <a:off x="4727448" y="2679191"/>
+            <a:ext cx="2706624" cy="310896"/>
           </a:xfrm>
           <a:prstGeom prst="rect">
             <a:avLst/>
@@ -11667,25 +10415,25 @@
                 <a:solidFill>
                   <a:srgbClr val="232222"/>
                 </a:solidFill>
-                <a:latin typeface="KingHwa_OldSong"/>
+                <a:latin typeface="Newsreader"/>
                 <a:ea typeface="京華老宋体"/>
-                <a:cs typeface="KingHwa_OldSong"/>
-              </a:rPr>
-              <a:t>Build</a:t>
-            </a:r>
-          </a:p>
-        </p:txBody>
-      </p:sp>
-      <p:sp>
-        <p:nvSpPr>
-          <p:cNvPr id="24" name="TextBox 23"/>
+                <a:cs typeface="Newsreader"/>
+              </a:rPr>
+              <a:t>Robotaxi Pilot</a:t>
+            </a:r>
+          </a:p>
+        </p:txBody>
+      </p:sp>
+      <p:sp>
+        <p:nvSpPr>
+          <p:cNvPr id="23" name="TextBox 22"/>
           <p:cNvSpPr txBox="1"/>
           <p:nvPr/>
         </p:nvSpPr>
         <p:spPr>
           <a:xfrm>
-            <a:off x="4005072" y="3730752"/>
-            <a:ext cx="1783080" cy="475488"/>
+            <a:off x="4727448" y="3118103"/>
+            <a:ext cx="2706624" cy="420624"/>
           </a:xfrm>
           <a:prstGeom prst="rect">
             <a:avLst/>
@@ -11708,60 +10456,25 @@
                 <a:solidFill>
                   <a:srgbClr val="4A4947"/>
                 </a:solidFill>
-                <a:latin typeface="Source Han Sans SC"/>
-                <a:ea typeface="京華老宋体"/>
-                <a:cs typeface="Source Han Sans SC"/>
-              </a:rPr>
-              <a:t>生成交付文件</a:t>
-            </a:r>
-          </a:p>
-        </p:txBody>
-      </p:sp>
-      <p:cxnSp>
-        <p:nvCxnSpPr>
-          <p:cNvPr id="25" name="Connector 24"/>
-          <p:cNvCxnSpPr/>
-          <p:nvPr/>
-        </p:nvCxnSpPr>
-        <p:spPr>
-          <a:xfrm>
-            <a:off x="6062472" y="3438144"/>
-            <a:ext cx="292608" cy="0"/>
-          </a:xfrm>
-          <a:prstGeom prst="line">
-            <a:avLst/>
-          </a:prstGeom>
-          <a:ln w="12700">
-            <a:solidFill>
-              <a:srgbClr val="4D5B6D"/>
-            </a:solidFill>
-          </a:ln>
-        </p:spPr>
-        <p:style>
-          <a:lnRef idx="2">
-            <a:schemeClr val="accent1"/>
-          </a:lnRef>
-          <a:fillRef idx="0">
-            <a:schemeClr val="accent1"/>
-          </a:fillRef>
-          <a:effectRef idx="1">
-            <a:schemeClr val="accent1"/>
-          </a:effectRef>
-          <a:fontRef idx="minor">
-            <a:schemeClr val="tx1"/>
-          </a:fontRef>
-        </p:style>
-      </p:cxnSp>
-      <p:sp>
-        <p:nvSpPr>
-          <p:cNvPr id="26" name="Rectangle 25"/>
+                <a:latin typeface="Newsreader"/>
+                <a:ea typeface="TsangerJinKai02-W04"/>
+                <a:cs typeface="Newsreader"/>
+              </a:rPr>
+              <a:t>首批城市能否跑出稳定运营天数与乘客复购。</a:t>
+            </a:r>
+          </a:p>
+        </p:txBody>
+      </p:sp>
+      <p:sp>
+        <p:nvSpPr>
+          <p:cNvPr id="24" name="Rectangle 23"/>
           <p:cNvSpPr/>
           <p:nvPr/>
         </p:nvSpPr>
         <p:spPr>
           <a:xfrm>
-            <a:off x="6437376" y="2852928"/>
-            <a:ext cx="2148840" cy="1170432"/>
+            <a:off x="8019288" y="2240279"/>
+            <a:ext cx="3072384" cy="1115568"/>
           </a:xfrm>
           <a:prstGeom prst="rect">
             <a:avLst/>
@@ -11800,14 +10513,14 @@
       </p:sp>
       <p:sp>
         <p:nvSpPr>
-          <p:cNvPr id="27" name="Rectangle 26"/>
+          <p:cNvPr id="25" name="Rectangle 24"/>
           <p:cNvSpPr/>
           <p:nvPr/>
         </p:nvSpPr>
         <p:spPr>
           <a:xfrm>
-            <a:off x="6437376" y="2852928"/>
-            <a:ext cx="2148840" cy="310896"/>
+            <a:off x="8019288" y="2240279"/>
+            <a:ext cx="3072384" cy="310896"/>
           </a:xfrm>
           <a:prstGeom prst="rect">
             <a:avLst/>
@@ -11844,14 +10557,14 @@
       </p:sp>
       <p:sp>
         <p:nvSpPr>
-          <p:cNvPr id="28" name="TextBox 27"/>
+          <p:cNvPr id="26" name="TextBox 25"/>
           <p:cNvSpPr txBox="1"/>
           <p:nvPr/>
         </p:nvSpPr>
         <p:spPr>
           <a:xfrm>
-            <a:off x="6601968" y="2944368"/>
-            <a:ext cx="1819656" cy="109728"/>
+            <a:off x="8183880" y="2331719"/>
+            <a:ext cx="2743200" cy="109728"/>
           </a:xfrm>
           <a:prstGeom prst="rect">
             <a:avLst/>
@@ -11875,24 +10588,24 @@
                   <a:srgbClr val="D5DEE7"/>
                 </a:solidFill>
                 <a:latin typeface="JetBrains Mono"/>
-                <a:ea typeface="京華老宋体"/>
+                <a:ea typeface="JetBrains Mono"/>
                 <a:cs typeface="JetBrains Mono"/>
               </a:rPr>
-              <a:t>03</a:t>
-            </a:r>
-          </a:p>
-        </p:txBody>
-      </p:sp>
-      <p:sp>
-        <p:nvSpPr>
-          <p:cNvPr id="29" name="TextBox 28"/>
+              <a:t>Q1</a:t>
+            </a:r>
+          </a:p>
+        </p:txBody>
+      </p:sp>
+      <p:sp>
+        <p:nvSpPr>
+          <p:cNvPr id="27" name="TextBox 26"/>
           <p:cNvSpPr txBox="1"/>
           <p:nvPr/>
         </p:nvSpPr>
         <p:spPr>
           <a:xfrm>
-            <a:off x="6620256" y="3291840"/>
-            <a:ext cx="1783080" cy="310896"/>
+            <a:off x="8202168" y="2679191"/>
+            <a:ext cx="2706624" cy="310896"/>
           </a:xfrm>
           <a:prstGeom prst="rect">
             <a:avLst/>
@@ -11915,25 +10628,25 @@
                 <a:solidFill>
                   <a:srgbClr val="232222"/>
                 </a:solidFill>
-                <a:latin typeface="KingHwa_OldSong"/>
+                <a:latin typeface="Newsreader"/>
                 <a:ea typeface="京華老宋体"/>
-                <a:cs typeface="KingHwa_OldSong"/>
-              </a:rPr>
-              <a:t>Verify</a:t>
-            </a:r>
-          </a:p>
-        </p:txBody>
-      </p:sp>
-      <p:sp>
-        <p:nvSpPr>
-          <p:cNvPr id="30" name="TextBox 29"/>
+                <a:cs typeface="Newsreader"/>
+              </a:rPr>
+              <a:t>Megapack Throughput</a:t>
+            </a:r>
+          </a:p>
+        </p:txBody>
+      </p:sp>
+      <p:sp>
+        <p:nvSpPr>
+          <p:cNvPr id="28" name="TextBox 27"/>
           <p:cNvSpPr txBox="1"/>
           <p:nvPr/>
         </p:nvSpPr>
         <p:spPr>
           <a:xfrm>
-            <a:off x="6620256" y="3730752"/>
-            <a:ext cx="1783080" cy="475488"/>
+            <a:off x="8202168" y="3118103"/>
+            <a:ext cx="2706624" cy="420624"/>
           </a:xfrm>
           <a:prstGeom prst="rect">
             <a:avLst/>
@@ -11956,60 +10669,25 @@
                 <a:solidFill>
                   <a:srgbClr val="4A4947"/>
                 </a:solidFill>
-                <a:latin typeface="Source Han Sans SC"/>
-                <a:ea typeface="京華老宋体"/>
-                <a:cs typeface="Source Han Sans SC"/>
-              </a:rPr>
-              <a:t>检查页数、字体、占位符</a:t>
-            </a:r>
-          </a:p>
-        </p:txBody>
-      </p:sp>
-      <p:cxnSp>
-        <p:nvCxnSpPr>
-          <p:cNvPr id="31" name="Connector 30"/>
-          <p:cNvCxnSpPr/>
-          <p:nvPr/>
-        </p:nvCxnSpPr>
-        <p:spPr>
-          <a:xfrm>
-            <a:off x="8677656" y="3438144"/>
-            <a:ext cx="292608" cy="0"/>
-          </a:xfrm>
-          <a:prstGeom prst="line">
-            <a:avLst/>
-          </a:prstGeom>
-          <a:ln w="12700">
-            <a:solidFill>
-              <a:srgbClr val="4D5B6D"/>
-            </a:solidFill>
-          </a:ln>
-        </p:spPr>
-        <p:style>
-          <a:lnRef idx="2">
-            <a:schemeClr val="accent1"/>
-          </a:lnRef>
-          <a:fillRef idx="0">
-            <a:schemeClr val="accent1"/>
-          </a:fillRef>
-          <a:effectRef idx="1">
-            <a:schemeClr val="accent1"/>
-          </a:effectRef>
-          <a:fontRef idx="minor">
-            <a:schemeClr val="tx1"/>
-          </a:fontRef>
-        </p:style>
-      </p:cxnSp>
-      <p:sp>
-        <p:nvSpPr>
-          <p:cNvPr id="32" name="Rectangle 31"/>
+                <a:latin typeface="Newsreader"/>
+                <a:ea typeface="TsangerJinKai02-W04"/>
+                <a:cs typeface="Newsreader"/>
+              </a:rPr>
+              <a:t>储能交付是否形成季度级稳定节拍。</a:t>
+            </a:r>
+          </a:p>
+        </p:txBody>
+      </p:sp>
+      <p:sp>
+        <p:nvSpPr>
+          <p:cNvPr id="29" name="Rectangle 28"/>
           <p:cNvSpPr/>
           <p:nvPr/>
         </p:nvSpPr>
         <p:spPr>
           <a:xfrm>
-            <a:off x="9052560" y="2852928"/>
-            <a:ext cx="2148840" cy="1170432"/>
+            <a:off x="1069848" y="3721607"/>
+            <a:ext cx="3072384" cy="1115568"/>
           </a:xfrm>
           <a:prstGeom prst="rect">
             <a:avLst/>
@@ -12048,14 +10726,14 @@
       </p:sp>
       <p:sp>
         <p:nvSpPr>
-          <p:cNvPr id="33" name="Rectangle 32"/>
+          <p:cNvPr id="30" name="Rectangle 29"/>
           <p:cNvSpPr/>
           <p:nvPr/>
         </p:nvSpPr>
         <p:spPr>
           <a:xfrm>
-            <a:off x="9052560" y="2852928"/>
-            <a:ext cx="2148840" cy="310896"/>
+            <a:off x="1069848" y="3721607"/>
+            <a:ext cx="3072384" cy="310896"/>
           </a:xfrm>
           <a:prstGeom prst="rect">
             <a:avLst/>
@@ -12092,14 +10770,14 @@
       </p:sp>
       <p:sp>
         <p:nvSpPr>
-          <p:cNvPr id="34" name="TextBox 33"/>
+          <p:cNvPr id="31" name="TextBox 30"/>
           <p:cNvSpPr txBox="1"/>
           <p:nvPr/>
         </p:nvSpPr>
         <p:spPr>
           <a:xfrm>
-            <a:off x="9217152" y="2944368"/>
-            <a:ext cx="1819656" cy="109728"/>
+            <a:off x="1234440" y="3813047"/>
+            <a:ext cx="2743200" cy="109728"/>
           </a:xfrm>
           <a:prstGeom prst="rect">
             <a:avLst/>
@@ -12123,24 +10801,24 @@
                   <a:srgbClr val="D5DEE7"/>
                 </a:solidFill>
                 <a:latin typeface="JetBrains Mono"/>
-                <a:ea typeface="京華老宋体"/>
+                <a:ea typeface="JetBrains Mono"/>
                 <a:cs typeface="JetBrains Mono"/>
               </a:rPr>
-              <a:t>04</a:t>
-            </a:r>
-          </a:p>
-        </p:txBody>
-      </p:sp>
-      <p:sp>
-        <p:nvSpPr>
-          <p:cNvPr id="35" name="TextBox 34"/>
+              <a:t>Q2</a:t>
+            </a:r>
+          </a:p>
+        </p:txBody>
+      </p:sp>
+      <p:sp>
+        <p:nvSpPr>
+          <p:cNvPr id="32" name="TextBox 31"/>
           <p:cNvSpPr txBox="1"/>
           <p:nvPr/>
         </p:nvSpPr>
         <p:spPr>
           <a:xfrm>
-            <a:off x="9235440" y="3291840"/>
-            <a:ext cx="1783080" cy="310896"/>
+            <a:off x="1252728" y="4160519"/>
+            <a:ext cx="2706624" cy="310896"/>
           </a:xfrm>
           <a:prstGeom prst="rect">
             <a:avLst/>
@@ -12163,25 +10841,25 @@
                 <a:solidFill>
                   <a:srgbClr val="232222"/>
                 </a:solidFill>
-                <a:latin typeface="KingHwa_OldSong"/>
+                <a:latin typeface="Newsreader"/>
                 <a:ea typeface="京華老宋体"/>
-                <a:cs typeface="KingHwa_OldSong"/>
-              </a:rPr>
-              <a:t>Preview</a:t>
-            </a:r>
-          </a:p>
-        </p:txBody>
-      </p:sp>
-      <p:sp>
-        <p:nvSpPr>
-          <p:cNvPr id="36" name="TextBox 35"/>
+                <a:cs typeface="Newsreader"/>
+              </a:rPr>
+              <a:t>Optimus Internal Use</a:t>
+            </a:r>
+          </a:p>
+        </p:txBody>
+      </p:sp>
+      <p:sp>
+        <p:nvSpPr>
+          <p:cNvPr id="33" name="TextBox 32"/>
           <p:cNvSpPr txBox="1"/>
           <p:nvPr/>
         </p:nvSpPr>
         <p:spPr>
           <a:xfrm>
-            <a:off x="9235440" y="3730752"/>
-            <a:ext cx="1783080" cy="475488"/>
+            <a:off x="1252728" y="4599431"/>
+            <a:ext cx="2706624" cy="420624"/>
           </a:xfrm>
           <a:prstGeom prst="rect">
             <a:avLst/>
@@ -12204,25 +10882,115 @@
                 <a:solidFill>
                   <a:srgbClr val="4A4947"/>
                 </a:solidFill>
-                <a:latin typeface="Source Han Sans SC"/>
-                <a:ea typeface="京華老宋体"/>
-                <a:cs typeface="Source Han Sans SC"/>
-              </a:rPr>
-              <a:t>导出 demo 预览</a:t>
-            </a:r>
-          </a:p>
-        </p:txBody>
-      </p:sp>
-      <p:sp>
-        <p:nvSpPr>
-          <p:cNvPr id="37" name="TextBox 36"/>
+                <a:latin typeface="Newsreader"/>
+                <a:ea typeface="TsangerJinKai02-W04"/>
+                <a:cs typeface="Newsreader"/>
+              </a:rPr>
+              <a:t>厂内替代工时是否可量化并形成标准方案。</a:t>
+            </a:r>
+          </a:p>
+        </p:txBody>
+      </p:sp>
+      <p:sp>
+        <p:nvSpPr>
+          <p:cNvPr id="34" name="Rectangle 33"/>
+          <p:cNvSpPr/>
+          <p:nvPr/>
+        </p:nvSpPr>
+        <p:spPr>
+          <a:xfrm>
+            <a:off x="4544568" y="3721607"/>
+            <a:ext cx="3072384" cy="1115568"/>
+          </a:xfrm>
+          <a:prstGeom prst="rect">
+            <a:avLst/>
+          </a:prstGeom>
+          <a:solidFill>
+            <a:srgbClr val="F3EFEB"/>
+          </a:solidFill>
+          <a:ln w="8890">
+            <a:solidFill>
+              <a:srgbClr val="D0C7BB"/>
+            </a:solidFill>
+          </a:ln>
+          <a:effectLst/>
+        </p:spPr>
+        <p:style>
+          <a:lnRef idx="1">
+            <a:schemeClr val="accent1"/>
+          </a:lnRef>
+          <a:fillRef idx="3">
+            <a:schemeClr val="accent1"/>
+          </a:fillRef>
+          <a:effectRef idx="2">
+            <a:schemeClr val="accent1"/>
+          </a:effectRef>
+          <a:fontRef idx="minor">
+            <a:schemeClr val="lt1"/>
+          </a:fontRef>
+        </p:style>
+        <p:txBody>
+          <a:bodyPr rtlCol="0" anchor="ctr"/>
+          <a:lstStyle/>
+          <a:p>
+            <a:pPr algn="ctr"/>
+          </a:p>
+        </p:txBody>
+      </p:sp>
+      <p:sp>
+        <p:nvSpPr>
+          <p:cNvPr id="35" name="Rectangle 34"/>
+          <p:cNvSpPr/>
+          <p:nvPr/>
+        </p:nvSpPr>
+        <p:spPr>
+          <a:xfrm>
+            <a:off x="4544568" y="3721607"/>
+            <a:ext cx="3072384" cy="310896"/>
+          </a:xfrm>
+          <a:prstGeom prst="rect">
+            <a:avLst/>
+          </a:prstGeom>
+          <a:solidFill>
+            <a:srgbClr val="243851"/>
+          </a:solidFill>
+          <a:ln>
+            <a:noFill/>
+          </a:ln>
+          <a:effectLst/>
+        </p:spPr>
+        <p:style>
+          <a:lnRef idx="1">
+            <a:schemeClr val="accent1"/>
+          </a:lnRef>
+          <a:fillRef idx="3">
+            <a:schemeClr val="accent1"/>
+          </a:fillRef>
+          <a:effectRef idx="2">
+            <a:schemeClr val="accent1"/>
+          </a:effectRef>
+          <a:fontRef idx="minor">
+            <a:schemeClr val="lt1"/>
+          </a:fontRef>
+        </p:style>
+        <p:txBody>
+          <a:bodyPr rtlCol="0" anchor="ctr"/>
+          <a:lstStyle/>
+          <a:p>
+            <a:pPr algn="ctr"/>
+          </a:p>
+        </p:txBody>
+      </p:sp>
+      <p:sp>
+        <p:nvSpPr>
+          <p:cNvPr id="36" name="TextBox 35"/>
           <p:cNvSpPr txBox="1"/>
           <p:nvPr/>
         </p:nvSpPr>
         <p:spPr>
           <a:xfrm>
-            <a:off x="1572768" y="5138928"/>
-            <a:ext cx="8961120" cy="566928"/>
+            <a:off x="4709160" y="3813047"/>
+            <a:ext cx="2743200" cy="109728"/>
           </a:xfrm>
           <a:prstGeom prst="rect">
             <a:avLst/>
@@ -12235,23 +11003,103 @@
           </a:bodyPr>
           <a:lstStyle/>
           <a:p>
-            <a:pPr algn="ctr">
-              <a:lnSpc>
-                <a:spcPct val="105000"/>
+            <a:pPr algn="l">
+              <a:lnSpc>
+                <a:spcPct val="100000"/>
+              </a:lnSpc>
+            </a:pPr>
+            <a:r>
+              <a:rPr sz="720" b="0">
+                <a:solidFill>
+                  <a:srgbClr val="D5DEE7"/>
+                </a:solidFill>
+                <a:latin typeface="JetBrains Mono"/>
+                <a:ea typeface="JetBrains Mono"/>
+                <a:cs typeface="JetBrains Mono"/>
+              </a:rPr>
+              <a:t>Q2</a:t>
+            </a:r>
+          </a:p>
+        </p:txBody>
+      </p:sp>
+      <p:sp>
+        <p:nvSpPr>
+          <p:cNvPr id="37" name="TextBox 36"/>
+          <p:cNvSpPr txBox="1"/>
+          <p:nvPr/>
+        </p:nvSpPr>
+        <p:spPr>
+          <a:xfrm>
+            <a:off x="4727448" y="4160519"/>
+            <a:ext cx="2706624" cy="310896"/>
+          </a:xfrm>
+          <a:prstGeom prst="rect">
+            <a:avLst/>
+          </a:prstGeom>
+          <a:noFill/>
+        </p:spPr>
+        <p:txBody>
+          <a:bodyPr wrap="square" lIns="0" rIns="0" tIns="0" bIns="0" anchor="t">
+            <a:spAutoFit/>
+          </a:bodyPr>
+          <a:lstStyle/>
+          <a:p>
+            <a:pPr algn="l">
+              <a:lnSpc>
+                <a:spcPct val="100000"/>
+              </a:lnSpc>
+            </a:pPr>
+            <a:r>
+              <a:rPr sz="1700" b="0">
+                <a:solidFill>
+                  <a:srgbClr val="232222"/>
+                </a:solidFill>
+                <a:latin typeface="Newsreader"/>
+                <a:ea typeface="京華老宋体"/>
+                <a:cs typeface="Newsreader"/>
+              </a:rPr>
+              <a:t>AI Cost Curve</a:t>
+            </a:r>
+          </a:p>
+        </p:txBody>
+      </p:sp>
+      <p:sp>
+        <p:nvSpPr>
+          <p:cNvPr id="38" name="TextBox 37"/>
+          <p:cNvSpPr txBox="1"/>
+          <p:nvPr/>
+        </p:nvSpPr>
+        <p:spPr>
+          <a:xfrm>
+            <a:off x="4727448" y="4599431"/>
+            <a:ext cx="2706624" cy="420624"/>
+          </a:xfrm>
+          <a:prstGeom prst="rect">
+            <a:avLst/>
+          </a:prstGeom>
+          <a:noFill/>
+        </p:spPr>
+        <p:txBody>
+          <a:bodyPr wrap="square" lIns="0" rIns="0" tIns="0" bIns="0" anchor="t">
+            <a:spAutoFit/>
+          </a:bodyPr>
+          <a:lstStyle/>
+          <a:p>
+            <a:pPr algn="l">
+              <a:lnSpc>
+                <a:spcPct val="115000"/>
               </a:lnSpc>
             </a:pPr>
             <a:r>
               <a:rPr sz="1050" b="0">
                 <a:solidFill>
-                  <a:srgbClr val="243851"/>
-                </a:solidFill>
-                <a:latin typeface="JetBrains Mono"/>
-                <a:ea typeface="京華老宋体"/>
-                <a:cs typeface="JetBrains Mono"/>
-              </a:rPr>
-              <a:t>.venv/bin/python scripts/build.py --verify one-pager
-.venv/bin/python scripts/build.py --check
-.venv/bin/python scripts/build.py slides</a:t>
+                  <a:srgbClr val="4A4947"/>
+                </a:solidFill>
+                <a:latin typeface="Newsreader"/>
+                <a:ea typeface="TsangerJinKai02-W04"/>
+                <a:cs typeface="Newsreader"/>
+              </a:rPr>
+              <a:t>算力投入是否沉淀成更高的软件附加值。</a:t>
             </a:r>
           </a:p>
         </p:txBody>
@@ -12507,7 +11355,7 @@
                   <a:srgbClr val="8B8782"/>
                 </a:solidFill>
                 <a:latin typeface="JetBrains Mono"/>
-                <a:ea typeface="京華老宋体"/>
+                <a:ea typeface="JetBrains Mono"/>
                 <a:cs typeface="JetBrains Mono"/>
               </a:rPr>
               <a:t>END</a:t>
@@ -12548,7 +11396,7 @@
                   <a:srgbClr val="8B8782"/>
                 </a:solidFill>
                 <a:latin typeface="JetBrains Mono"/>
-                <a:ea typeface="京華老宋体"/>
+                <a:ea typeface="JetBrains Mono"/>
                 <a:cs typeface="JetBrains Mono"/>
               </a:rPr>
               <a:t>08 / 08</a:t>
@@ -12588,11 +11436,11 @@
                 <a:solidFill>
                   <a:srgbClr val="243851"/>
                 </a:solidFill>
-                <a:latin typeface="KingHwa_OldSong"/>
+                <a:latin typeface="Newsreader"/>
                 <a:ea typeface="京華老宋体"/>
-                <a:cs typeface="KingHwa_OldSong"/>
-              </a:rPr>
-              <a:t>好看的本质是稳定</a:t>
+                <a:cs typeface="Newsreader"/>
+              </a:rPr>
+              <a:t>先看兑现节奏，再看叙事想象力</a:t>
             </a:r>
           </a:p>
         </p:txBody>
@@ -12664,11 +11512,11 @@
                 <a:solidFill>
                   <a:srgbClr val="666361"/>
                 </a:solidFill>
-                <a:latin typeface="Source Han Sans SC"/>
-                <a:ea typeface="京華老宋体"/>
-                <a:cs typeface="Source Han Sans SC"/>
-              </a:rPr>
-              <a:t>固定版式 · design token · 字体层级 · 构建校验</a:t>
+                <a:latin typeface="Newsreader"/>
+                <a:ea typeface="TsangerJinKai02-W04"/>
+                <a:cs typeface="Newsreader"/>
+              </a:rPr>
+              <a:t>Mock 数据 · Mock 图片 · Manuscript 版式 · PPTX / Slidev 双交付</a:t>
             </a:r>
           </a:p>
         </p:txBody>
@@ -12706,10 +11554,10 @@
                   <a:srgbClr val="8B8782"/>
                 </a:solidFill>
                 <a:latin typeface="JetBrains Mono"/>
-                <a:ea typeface="京華老宋体"/>
+                <a:ea typeface="JetBrains Mono"/>
                 <a:cs typeface="JetBrains Mono"/>
               </a:rPr>
-              <a:t>KAMI · REPUBLICAN MANUSCRIPT EDITION</a:t>
+              <a:t>TESLA 2027 MOCK BRIEFING · GENERATED WITH KAMI</a:t>
             </a:r>
           </a:p>
         </p:txBody>
@@ -12766,12 +11614,12 @@
     <a:fontScheme name="Office">
       <a:majorFont>
         <a:latin typeface="Calibri"/>
-        <a:ea typeface="京華老宋体"/>
+        <a:ea typeface="TsangerJinKai02-W04"/>
         <a:cs typeface=""/>
         <a:font script="Jpan" typeface="ＭＳ Ｐゴシック"/>
         <a:font script="Hang" typeface="맑은 고딕"/>
-        <a:font script="Hans" typeface="京華老宋体"/>
-        <a:font script="Hant" typeface="京華老宋体"/>
+        <a:font script="Hans" typeface="TsangerJinKai02-W04"/>
+        <a:font script="Hant" typeface="TsangerJinKai02-W04"/>
         <a:font script="Arab" typeface="Times New Roman"/>
         <a:font script="Hebr" typeface="Times New Roman"/>
         <a:font script="Thai" typeface="Angsana New"/>
@@ -12801,12 +11649,12 @@
       </a:majorFont>
       <a:minorFont>
         <a:latin typeface="Calibri"/>
-        <a:ea typeface="京華老宋体"/>
+        <a:ea typeface="TsangerJinKai02-W04"/>
         <a:cs typeface=""/>
         <a:font script="Jpan" typeface="ＭＳ Ｐゴシック"/>
         <a:font script="Hang" typeface="맑은 고딕"/>
-        <a:font script="Hans" typeface="京華老宋体"/>
-        <a:font script="Hant" typeface="京華老宋体"/>
+        <a:font script="Hans" typeface="TsangerJinKai02-W04"/>
+        <a:font script="Hant" typeface="TsangerJinKai02-W04"/>
         <a:font script="Arab" typeface="Arial"/>
         <a:font script="Hebr" typeface="Arial"/>
         <a:font script="Thai" typeface="Cordia New"/>
